--- a/lecons/F1/08_F1_M2_L05_Natural_Regions_Bio_climatic_Zones_of_Cameroon.pptx
+++ b/lecons/F1/08_F1_M2_L05_Natural_Regions_Bio_climatic_Zones_of_Cameroon.pptx
@@ -59,9 +59,11 @@
     <p:sldId id="307" r:id="rId53"/>
     <p:sldId id="308" r:id="rId54"/>
     <p:sldId id="309" r:id="rId55"/>
+    <p:sldId id="310" r:id="rId56"/>
+    <p:sldId id="311" r:id="rId57"/>
   </p:sldIdLst>
   <p:notesMasterIdLst>
-    <p:notesMasterId r:id="rId56"/>
+    <p:notesMasterId r:id="rId58"/>
   </p:notesMasterIdLst>
   <p:sldSz cx="12192000" cy="6858000"/>
   <p:notesSz cx="6858000" cy="12192000"/>
@@ -643,7 +645,7 @@
           <a:p>
             <a:r>
               <a:rPr lang="en-US" dirty="0"/>
-              <a:t>Listen carefully to this situation from real life. Paul travels from Ebolowa to Garoua by bus. At the start he sees a thick green forest, then tall grass with scattered trees, and near Garoua short grass and thorny trees. He wonders why the landscape changes. Think about it, because I am going to ask you some questions.</a:t>
+              <a:t>Listen carefully to this situation from real life. Paul travels by bus from Ebolowa to Garoua. At the start he sees a thick green forest, then tall grass with scattered trees, and near Garoua short grass and thorny trees. Paul asks the driver: "Why does the landscape change so much from the south to the north?" Think about it, because I am going to ask you some questions.</a:t>
             </a:r>
             <a:endParaRPr lang="en-US" dirty="0"/>
           </a:p>
@@ -819,7 +821,7 @@
           <a:p>
             <a:r>
               <a:rPr lang="en-US" dirty="0"/>
-              <a:t>Good. Paul does not know why the vegetation changes from south to north.</a:t>
+              <a:t>Good. Paul does not know why the vegetation changes from the south to the north.</a:t>
             </a:r>
             <a:endParaRPr lang="en-US" dirty="0"/>
           </a:p>
@@ -1083,7 +1085,7 @@
           <a:p>
             <a:r>
               <a:rPr lang="en-US" dirty="0"/>
-              <a:t>Question 3: What vegetation does he see in the north? Think for a moment, then raise your hand to answer.</a:t>
+              <a:t>Question 3: What vegetation does he see near Garoua? Think for a moment, then raise your hand to answer.</a:t>
             </a:r>
             <a:endParaRPr lang="en-US" dirty="0"/>
           </a:p>
@@ -1435,7 +1437,7 @@
           <a:p>
             <a:r>
               <a:rPr lang="en-US" dirty="0"/>
-              <a:t>Activity 1. Look carefully at this diagram: the vegetation zones of Cameroon. Observe every detail before I ask the question.</a:t>
+              <a:t>Activity 1. Look carefully at this diagram: the vegetation of Cameroon. Observe every detail before I ask the question.</a:t>
             </a:r>
             <a:endParaRPr lang="en-US" dirty="0"/>
           </a:p>
@@ -1611,7 +1613,7 @@
           <a:p>
             <a:r>
               <a:rPr lang="en-US" dirty="0"/>
-              <a:t>Here is the question for Activity 1: Name the two main natural regions of Cameroon and where they are found. Take one minute to think and write your answer in your rough notebook.</a:t>
+              <a:t>Here is the question for Activity 1: Where is the forest found in Cameroon, and where is the savanna found? Take one minute to think and write your answer in your rough notebook.</a:t>
             </a:r>
             <a:endParaRPr lang="en-US" dirty="0"/>
           </a:p>
@@ -1699,7 +1701,7 @@
           <a:p>
             <a:r>
               <a:rPr lang="en-US" dirty="0"/>
-              <a:t>Let us check the answer together. The equatorial region in the south and the tropical region in the north.</a:t>
+              <a:t>Let us check the answer together. The forest is in the south, and the savanna is in the north.</a:t>
             </a:r>
             <a:endParaRPr lang="en-US" dirty="0"/>
           </a:p>
@@ -1875,7 +1877,7 @@
           <a:p>
             <a:r>
               <a:rPr lang="en-US" dirty="0"/>
-              <a:t>Here is the question for Activity 2: Describe the climate of Yaoundé. Take one minute to think and write your answer in your rough notebook.</a:t>
+              <a:t>Here is the question for Activity 2: In how many months does it rain in Yaoundé? Take one minute to think and write your answer in your rough notebook.</a:t>
             </a:r>
             <a:endParaRPr lang="en-US" dirty="0"/>
           </a:p>
@@ -1963,7 +1965,7 @@
           <a:p>
             <a:r>
               <a:rPr lang="en-US" dirty="0"/>
-              <a:t>Let us check the answer together. It is hot all year (about 24 °C) and it rains in almost every month.</a:t>
+              <a:t>Let us check the answer together. In almost every month of the year.</a:t>
             </a:r>
             <a:endParaRPr lang="en-US" dirty="0"/>
           </a:p>
@@ -2139,7 +2141,7 @@
           <a:p>
             <a:r>
               <a:rPr lang="en-US" dirty="0"/>
-              <a:t>Here is the question for Activity 3: Describe the vegetation and the soil of the equatorial region. Take one minute to think and write your answer in your rough notebook.</a:t>
+              <a:t>Here is the question for Activity 3: Why is the forest of the south always green? Take one minute to think and write your answer in your rough notebook.</a:t>
             </a:r>
             <a:endParaRPr lang="en-US" dirty="0"/>
           </a:p>
@@ -2227,7 +2229,7 @@
           <a:p>
             <a:r>
               <a:rPr lang="en-US" dirty="0"/>
-              <a:t>Let us check the answer together. A thick evergreen rainforest on red ferrallitic soils.</a:t>
+              <a:t>Let us check the answer together. Because it is hot and it rains in almost every month.</a:t>
             </a:r>
             <a:endParaRPr lang="en-US" dirty="0"/>
           </a:p>
@@ -2491,7 +2493,7 @@
           <a:p>
             <a:r>
               <a:rPr lang="en-US" dirty="0"/>
-              <a:t>Our topic is Let's Preserve our Environment, and the sub-topic is Natural Regions (Bio-climatic Zones) and their Degradation. The key notions we shall use today are: natural region, rainforest, ferrallitic soil, savanna, ferruginous soil, Sahel. At the end, you should be able to do this: learners are able to locate the natural regions of Cameroon and describe their climate, vegetation and soils.</a:t>
+              <a:t>Our topic is Let's Preserve our Environment, and the sub-topic is Natural Regions (Bio-climatic Zones) and their Degradation. The key notions we shall use today are: rainforest, ferrallitic soil, savanna, ferruginous soil, Sahel. At the end, you should be able to do this: learners are able to locate the natural regions of Cameroon and describe their climate, vegetation and soils.</a:t>
             </a:r>
             <a:endParaRPr lang="en-US" dirty="0"/>
           </a:p>
@@ -2579,7 +2581,7 @@
           <a:p>
             <a:r>
               <a:rPr lang="en-US" dirty="0"/>
-              <a:t>Let us check the answer together. Two: a rainy season (May–October) and a long dry season.</a:t>
+              <a:t>Let us check the answer together. Two: a rainy season (May to October) and a long dry season.</a:t>
             </a:r>
             <a:endParaRPr lang="en-US" dirty="0"/>
           </a:p>
@@ -2755,7 +2757,7 @@
           <a:p>
             <a:r>
               <a:rPr lang="en-US" dirty="0"/>
-              <a:t>Here is the question for Activity 5: Describe the vegetation and the soil of the tropical region. Take one minute to think and write your answer in your rough notebook.</a:t>
+              <a:t>Here is the question for Activity 5: Why are there fewer trees in the north than in the south? Take one minute to think and write your answer in your rough notebook.</a:t>
             </a:r>
             <a:endParaRPr lang="en-US" dirty="0"/>
           </a:p>
@@ -2843,7 +2845,7 @@
           <a:p>
             <a:r>
               <a:rPr lang="en-US" dirty="0"/>
-              <a:t>Let us check the answer together. Savanna of grass with scattered trees, becoming Sahel (steppe) in the far north, on ferruginous soils.</a:t>
+              <a:t>Let us check the answer together. Because there is less rain and a long dry season.</a:t>
             </a:r>
             <a:endParaRPr lang="en-US" dirty="0"/>
           </a:p>
@@ -3019,7 +3021,7 @@
           <a:p>
             <a:r>
               <a:rPr lang="en-US" dirty="0"/>
-              <a:t>Let us copy the definitions. The key terms of this lesson are defined as follows. On this slide we have Natural region. Write each point on a new line, with the key term first, and explain it in your own words when we revise.</a:t>
+              <a:t>Let us copy the definitions. The key terms of this lesson are defined as follows. On this slide we have Natural region (bio-climatic zone). Write each point on a new line, with the key term first, and explain it in your own words when we revise.</a:t>
             </a:r>
             <a:endParaRPr lang="en-US" dirty="0"/>
           </a:p>
@@ -3107,7 +3109,7 @@
           <a:p>
             <a:r>
               <a:rPr lang="en-US" dirty="0"/>
-              <a:t>Let us copy The Equatorial Region. The equatorial region of southern Cameroon has the following characteristics. On this slide we have Location and Climate. Write each point on a new line, with the key term first, and explain it in your own words when we revise. When you finish, we go to the next slide.</a:t>
+              <a:t>Let us copy The Equatorial Region. The equatorial region of southern Cameroon has the following characteristics. Copy the point on Location on the left, then draw the diagram on the right: the natural regions of Cameroon. Give it a title and label it clearly.</a:t>
             </a:r>
             <a:endParaRPr lang="en-US" dirty="0"/>
           </a:p>
@@ -3195,7 +3197,7 @@
           <a:p>
             <a:r>
               <a:rPr lang="en-US" dirty="0"/>
-              <a:t>We continue with The Equatorial Region. On this slide we have Vegetation and Soil. Write each point on a new line, with the key term first, and explain it in your own words when we revise.</a:t>
+              <a:t>Copy the point on Climate on the left, then draw the diagram on the right: the climate of Yaoundé. Give it a title and label it clearly.</a:t>
             </a:r>
             <a:endParaRPr lang="en-US" dirty="0"/>
           </a:p>
@@ -3283,7 +3285,7 @@
           <a:p>
             <a:r>
               <a:rPr lang="en-US" dirty="0"/>
-              <a:t>Now draw this illustration in your notebook: the natural regions of Cameroon. Give it a title and label it clearly.</a:t>
+              <a:t>Copy the point on Vegetation on the left, then draw the diagram on the right: the equatorial rainforest. Give it a title and label it clearly.</a:t>
             </a:r>
             <a:endParaRPr lang="en-US" dirty="0"/>
           </a:p>
@@ -3371,7 +3373,7 @@
           <a:p>
             <a:r>
               <a:rPr lang="en-US" dirty="0"/>
-              <a:t>Let us copy The Tropical Region. The tropical region of northern Cameroon has the following characteristics. On this slide we have Location and Climate. Write each point on a new line, with the key term first, and explain it in your own words when we revise. When you finish, we go to the next slide.</a:t>
+              <a:t>Copy the point on Soil on the left, then draw the diagram on the right: red ferrallitic soil. Give it a title and label it clearly.</a:t>
             </a:r>
             <a:endParaRPr lang="en-US" dirty="0"/>
           </a:p>
@@ -3547,7 +3549,7 @@
           <a:p>
             <a:r>
               <a:rPr lang="en-US" dirty="0"/>
-              <a:t>We continue with The Tropical Region. On this slide we have Vegetation and Soil. Write each point on a new line, with the key term first, and explain it in your own words when we revise.</a:t>
+              <a:t>Let us copy The Tropical Region. The tropical region of northern Cameroon has the following characteristics. Copy the point on Location on the left, then draw the diagram on the right: the climates of Cameroon. Give it a title and label it clearly.</a:t>
             </a:r>
             <a:endParaRPr lang="en-US" dirty="0"/>
           </a:p>
@@ -3635,7 +3637,7 @@
           <a:p>
             <a:r>
               <a:rPr lang="en-US" dirty="0"/>
-              <a:t>Now draw this illustration in your notebook: the climate of Garoua. Give it a title and label it clearly.</a:t>
+              <a:t>Copy the point on Climate on the left, then draw the diagram on the right: the climate of Garoua. Give it a title and label it clearly.</a:t>
             </a:r>
             <a:endParaRPr lang="en-US" dirty="0"/>
           </a:p>
@@ -3723,7 +3725,7 @@
           <a:p>
             <a:r>
               <a:rPr lang="en-US" dirty="0"/>
-              <a:t>Now let us check what you have understood. Question 1: Name the two main natural regions of Cameroon. Answer in your exercise book.</a:t>
+              <a:t>Copy the point on Vegetation on the left, then draw the diagram on the right: the savanna. Give it a title and label it clearly.</a:t>
             </a:r>
             <a:endParaRPr lang="en-US" dirty="0"/>
           </a:p>
@@ -3811,7 +3813,7 @@
           <a:p>
             <a:r>
               <a:rPr lang="en-US" dirty="0"/>
-              <a:t>The expected answer is: the equatorial region and the tropical region. If you got it right, well done.</a:t>
+              <a:t>Copy the point on Soil on the left, then draw the diagram on the right: ferruginous soil. Give it a title and label it clearly.</a:t>
             </a:r>
             <a:endParaRPr lang="en-US" dirty="0"/>
           </a:p>
@@ -3899,7 +3901,7 @@
           <a:p>
             <a:r>
               <a:rPr lang="en-US" dirty="0"/>
-              <a:t>Now let us check what you have understood. Question 2: Give one characteristic of the climate of each. Answer in your exercise book.</a:t>
+              <a:t>Now let us check what you have understood. Question 1: Name the two main natural regions of Cameroon. Answer in your exercise book.</a:t>
             </a:r>
             <a:endParaRPr lang="en-US" dirty="0"/>
           </a:p>
@@ -3987,7 +3989,7 @@
           <a:p>
             <a:r>
               <a:rPr lang="en-US" dirty="0"/>
-              <a:t>The expected answer is: equatorial: rain in almost every month. Tropical: a long dry season. If you got it right, well done.</a:t>
+              <a:t>The expected answer is: the equatorial region and the tropical region. If you got it right, well done.</a:t>
             </a:r>
             <a:endParaRPr lang="en-US" dirty="0"/>
           </a:p>
@@ -4075,7 +4077,7 @@
           <a:p>
             <a:r>
               <a:rPr lang="en-US" dirty="0"/>
-              <a:t>Take your time to copy this part; we will continue together.</a:t>
+              <a:t>Now let us check what you have understood. Question 2: Give one characteristic of the climate of each. Answer in your exercise book.</a:t>
             </a:r>
             <a:endParaRPr lang="en-US" dirty="0"/>
           </a:p>
@@ -4163,7 +4165,7 @@
           <a:p>
             <a:r>
               <a:rPr lang="en-US" dirty="0"/>
-              <a:t>For those who need more practice, fill in the blanks in your exercise book. The answers are: number 1, rainforest; number 2, savanna; number 3, ferrallitic.</a:t>
+              <a:t>The expected answer is: equatorial: rain in almost every month. Tropical: a long dry season. If you got it right, well done.</a:t>
             </a:r>
             <a:endParaRPr lang="en-US" dirty="0"/>
           </a:p>
@@ -4251,7 +4253,7 @@
           <a:p>
             <a:r>
               <a:rPr lang="en-US" dirty="0"/>
-              <a:t>For your homework: Ask an elder how many months of rain there are in Garoua each year and write down the months. We shall correct it at the beginning of our next lesson.</a:t>
+              <a:t>Take your time to copy this part; we will continue together.</a:t>
             </a:r>
             <a:endParaRPr lang="en-US" dirty="0"/>
           </a:p>
@@ -4339,7 +4341,7 @@
           <a:p>
             <a:r>
               <a:rPr lang="en-US" dirty="0"/>
-              <a:t>Our next lesson will be on Practical Work 4: Construction and Reading of a Climograph. Thank you for your attention, and see you next time.</a:t>
+              <a:t>For those who need more practice, fill in the blanks in your exercise book. The answers are: number 1, rainforest; number 2, savanna; number 3, ferrallitic.</a:t>
             </a:r>
             <a:endParaRPr lang="en-US" dirty="0"/>
           </a:p>
@@ -4515,7 +4517,7 @@
           <a:p>
             <a:r>
               <a:rPr lang="en-US" dirty="0"/>
-              <a:t>Let us play the bilingual game. I say a word in English, and you give me the French word. Then we do the reverse.</a:t>
+              <a:t>For your homework: Ask an elder how many months of rain there are in Garoua each year and write down the months. We shall correct it at the beginning of our next lesson.</a:t>
             </a:r>
             <a:endParaRPr lang="en-US" dirty="0"/>
           </a:p>
@@ -4603,7 +4605,7 @@
           <a:p>
             <a:r>
               <a:rPr lang="en-US" dirty="0"/>
-              <a:t>I record this information in the official logbook of the class after the lesson.</a:t>
+              <a:t>Our next lesson will be on Practical Work 4: Construction and Reading of a Climograph. Thank you for your attention, and see you next time.</a:t>
             </a:r>
             <a:endParaRPr lang="en-US" dirty="0"/>
           </a:p>
@@ -4691,7 +4693,7 @@
           <a:p>
             <a:r>
               <a:rPr lang="en-US" dirty="0"/>
-              <a:t>I complete the second page of the logbook: the matter taught, the evaluation, the homework and the attendance.</a:t>
+              <a:t>Let us play the bilingual game. I say a word in English, and you give me the French word. Then we do the reverse.</a:t>
             </a:r>
             <a:endParaRPr lang="en-US" dirty="0"/>
           </a:p>
@@ -4779,7 +4781,7 @@
           <a:p>
             <a:r>
               <a:rPr lang="en-US" dirty="0"/>
-              <a:t>This slide is for me, the teacher: it gives the timing of the lesson and what to do if the projector is not available.</a:t>
+              <a:t>I record this information in the official logbook of the class after the lesson.</a:t>
             </a:r>
             <a:endParaRPr lang="en-US" dirty="0"/>
           </a:p>
@@ -4867,7 +4869,7 @@
           <a:p>
             <a:r>
               <a:rPr lang="en-US" dirty="0"/>
-              <a:t>These are the references and picture credits used to prepare this lesson.</a:t>
+              <a:t>I complete the second page of the logbook: the matter taught, the evaluation, the homework and the attendance.</a:t>
             </a:r>
             <a:endParaRPr lang="en-US" dirty="0"/>
           </a:p>
@@ -4891,6 +4893,182 @@
             <a:fld id="{F7021451-1387-4CA6-816F-3879F97B5CBC}" type="slidenum">
               <a:rPr lang="en-US"/>
               <a:t>54</a:t>
+            </a:fld>
+            <a:endParaRPr lang="en-US"/>
+          </a:p>
+        </p:txBody>
+      </p:sp>
+    </p:spTree>
+    <p:extLst>
+      <p:ext uri="{BB962C8B-B14F-4D97-AF65-F5344CB8AC3E}">
+        <p14:creationId xmlns:p14="http://schemas.microsoft.com/office/powerpoint/2010/main" val="1024086991"/>
+      </p:ext>
+    </p:extLst>
+  </p:cSld>
+  <p:clrMapOvr>
+    <a:masterClrMapping/>
+  </p:clrMapOvr>
+</p:notes>
+</file>
+
+<file path=ppt/notesSlides/notesSlide55.xml><?xml version="1.0" encoding="utf-8"?>
+<p:notes xmlns:a="http://schemas.openxmlformats.org/drawingml/2006/main" xmlns:r="http://schemas.openxmlformats.org/officeDocument/2006/relationships" xmlns:p="http://schemas.openxmlformats.org/presentationml/2006/main">
+  <p:cSld>
+    <p:spTree>
+      <p:nvGrpSpPr>
+        <p:cNvPr id="1" name=""/>
+        <p:cNvGrpSpPr/>
+        <p:nvPr/>
+      </p:nvGrpSpPr>
+      <p:grpSpPr>
+        <a:xfrm>
+          <a:off x="0" y="0"/>
+          <a:ext cx="0" cy="0"/>
+          <a:chOff x="0" y="0"/>
+          <a:chExt cx="0" cy="0"/>
+        </a:xfrm>
+      </p:grpSpPr>
+      <p:sp>
+        <p:nvSpPr>
+          <p:cNvPr id="2" name="Slide Image Placeholder 1"/>
+          <p:cNvSpPr>
+            <a:spLocks noGrp="1" noRot="1" noChangeAspect="1"/>
+          </p:cNvSpPr>
+          <p:nvPr>
+            <p:ph type="sldImg"/>
+          </p:nvPr>
+        </p:nvSpPr>
+        <p:spPr/>
+      </p:sp>
+      <p:sp>
+        <p:nvSpPr>
+          <p:cNvPr id="3" name="Notes Placeholder 2"/>
+          <p:cNvSpPr>
+            <a:spLocks noGrp="1"/>
+          </p:cNvSpPr>
+          <p:nvPr>
+            <p:ph type="body" idx="1"/>
+          </p:nvPr>
+        </p:nvSpPr>
+        <p:spPr/>
+        <p:txBody>
+          <a:bodyPr/>
+          <a:lstStyle/>
+          <a:p>
+            <a:r>
+              <a:rPr lang="en-US" dirty="0"/>
+              <a:t>This slide is for me, the teacher: it gives the timing of the lesson and what to do if the projector is not available.</a:t>
+            </a:r>
+            <a:endParaRPr lang="en-US" dirty="0"/>
+          </a:p>
+        </p:txBody>
+      </p:sp>
+      <p:sp>
+        <p:nvSpPr>
+          <p:cNvPr id="4" name="Slide Number Placeholder 3"/>
+          <p:cNvSpPr>
+            <a:spLocks noGrp="1"/>
+          </p:cNvSpPr>
+          <p:nvPr>
+            <p:ph type="sldNum" sz="quarter" idx="10"/>
+          </p:nvPr>
+        </p:nvSpPr>
+        <p:spPr/>
+        <p:txBody>
+          <a:bodyPr/>
+          <a:lstStyle/>
+          <a:p>
+            <a:fld id="{F7021451-1387-4CA6-816F-3879F97B5CBC}" type="slidenum">
+              <a:rPr lang="en-US"/>
+              <a:t>55</a:t>
+            </a:fld>
+            <a:endParaRPr lang="en-US"/>
+          </a:p>
+        </p:txBody>
+      </p:sp>
+    </p:spTree>
+    <p:extLst>
+      <p:ext uri="{BB962C8B-B14F-4D97-AF65-F5344CB8AC3E}">
+        <p14:creationId xmlns:p14="http://schemas.microsoft.com/office/powerpoint/2010/main" val="1024086991"/>
+      </p:ext>
+    </p:extLst>
+  </p:cSld>
+  <p:clrMapOvr>
+    <a:masterClrMapping/>
+  </p:clrMapOvr>
+</p:notes>
+</file>
+
+<file path=ppt/notesSlides/notesSlide56.xml><?xml version="1.0" encoding="utf-8"?>
+<p:notes xmlns:a="http://schemas.openxmlformats.org/drawingml/2006/main" xmlns:r="http://schemas.openxmlformats.org/officeDocument/2006/relationships" xmlns:p="http://schemas.openxmlformats.org/presentationml/2006/main">
+  <p:cSld>
+    <p:spTree>
+      <p:nvGrpSpPr>
+        <p:cNvPr id="1" name=""/>
+        <p:cNvGrpSpPr/>
+        <p:nvPr/>
+      </p:nvGrpSpPr>
+      <p:grpSpPr>
+        <a:xfrm>
+          <a:off x="0" y="0"/>
+          <a:ext cx="0" cy="0"/>
+          <a:chOff x="0" y="0"/>
+          <a:chExt cx="0" cy="0"/>
+        </a:xfrm>
+      </p:grpSpPr>
+      <p:sp>
+        <p:nvSpPr>
+          <p:cNvPr id="2" name="Slide Image Placeholder 1"/>
+          <p:cNvSpPr>
+            <a:spLocks noGrp="1" noRot="1" noChangeAspect="1"/>
+          </p:cNvSpPr>
+          <p:nvPr>
+            <p:ph type="sldImg"/>
+          </p:nvPr>
+        </p:nvSpPr>
+        <p:spPr/>
+      </p:sp>
+      <p:sp>
+        <p:nvSpPr>
+          <p:cNvPr id="3" name="Notes Placeholder 2"/>
+          <p:cNvSpPr>
+            <a:spLocks noGrp="1"/>
+          </p:cNvSpPr>
+          <p:nvPr>
+            <p:ph type="body" idx="1"/>
+          </p:nvPr>
+        </p:nvSpPr>
+        <p:spPr/>
+        <p:txBody>
+          <a:bodyPr/>
+          <a:lstStyle/>
+          <a:p>
+            <a:r>
+              <a:rPr lang="en-US" dirty="0"/>
+              <a:t>These are the references and picture credits used to prepare this lesson.</a:t>
+            </a:r>
+            <a:endParaRPr lang="en-US" dirty="0"/>
+          </a:p>
+        </p:txBody>
+      </p:sp>
+      <p:sp>
+        <p:nvSpPr>
+          <p:cNvPr id="4" name="Slide Number Placeholder 3"/>
+          <p:cNvSpPr>
+            <a:spLocks noGrp="1"/>
+          </p:cNvSpPr>
+          <p:nvPr>
+            <p:ph type="sldNum" sz="quarter" idx="10"/>
+          </p:nvPr>
+        </p:nvSpPr>
+        <p:spPr/>
+        <p:txBody>
+          <a:bodyPr/>
+          <a:lstStyle/>
+          <a:p>
+            <a:fld id="{F7021451-1387-4CA6-816F-3879F97B5CBC}" type="slidenum">
+              <a:rPr lang="en-US"/>
+              <a:t>56</a:t>
             </a:fld>
             <a:endParaRPr lang="en-US"/>
           </a:p>
@@ -5131,7 +5309,7 @@
           <a:p>
             <a:r>
               <a:rPr lang="en-US" dirty="0"/>
-              <a:t>By the end of this lesson, you should be able to do three things. Number 1: locate the equatorial and tropical regions of Cameroon. Number 2: describe their climate, vegetation and soils. Number 3: compare the two regions.</a:t>
+              <a:t>By the end of this lesson, you should be able to do three things. Number 1: locate the equatorial and tropical regions of Cameroon. Number 2: describe the climate, vegetation and soils of the equatorial region. Number 3: describe the climate, vegetation and soils of the tropical region.</a:t>
             </a:r>
             <a:endParaRPr lang="en-US" dirty="0"/>
           </a:p>
@@ -6599,7 +6777,7 @@
         <p:spPr>
           <a:xfrm>
             <a:off x="0" y="658368"/>
-            <a:ext cx="3840480" cy="5833872"/>
+            <a:ext cx="2468880" cy="5833872"/>
           </a:xfrm>
           <a:prstGeom prst="rect">
             <a:avLst/>
@@ -6614,8 +6792,8 @@
         </p:nvSpPr>
         <p:spPr>
           <a:xfrm>
-            <a:off x="4069080" y="1005840"/>
-            <a:ext cx="7802575" cy="731520"/>
+            <a:off x="2697480" y="1005840"/>
+            <a:ext cx="9174175" cy="731520"/>
           </a:xfrm>
           <a:prstGeom prst="rect">
             <a:avLst/>
@@ -6655,8 +6833,8 @@
         </p:nvSpPr>
         <p:spPr>
           <a:xfrm>
-            <a:off x="4069080" y="1783080"/>
-            <a:ext cx="7802575" cy="4663440"/>
+            <a:off x="2697480" y="1783080"/>
+            <a:ext cx="9174175" cy="4663440"/>
           </a:xfrm>
           <a:prstGeom prst="rect">
             <a:avLst/>
@@ -6683,7 +6861,7 @@
                 <a:ea typeface="Times New Roman" pitchFamily="34" charset="-122"/>
                 <a:cs typeface="Times New Roman" pitchFamily="34" charset="-120"/>
               </a:rPr>
-              <a:t>Paul travels from Ebolowa to Garoua by bus. At the start he sees a thick green forest, then tall grass with scattered trees, and near Garoua short grass and thorny trees. He wonders why the landscape changes.</a:t>
+              <a:t>Paul travels by bus from Ebolowa to Garoua. At the start he sees a thick green forest, then tall grass with scattered trees, and near Garoua short grass and thorny trees. Paul asks the driver: "Why does the landscape change so much from the south to the north?"</a:t>
             </a:r>
             <a:endParaRPr lang="en-US" sz="4000" dirty="0"/>
           </a:p>
@@ -7121,7 +7299,7 @@
                 <a:ea typeface="Times New Roman" pitchFamily="34" charset="-122"/>
                 <a:cs typeface="Times New Roman" pitchFamily="34" charset="-120"/>
               </a:rPr>
-              <a:t>Paul does not know why the vegetation changes from south to north.</a:t>
+              <a:t>Paul does not know why the vegetation changes from the south to the north.</a:t>
             </a:r>
             <a:endParaRPr lang="en-US" sz="4000" dirty="0"/>
           </a:p>
@@ -7778,7 +7956,7 @@
                 <a:ea typeface="Times New Roman" pitchFamily="34" charset="-122"/>
                 <a:cs typeface="Times New Roman" pitchFamily="34" charset="-120"/>
               </a:rPr>
-              <a:t>What vegetation does he see in the north?</a:t>
+              <a:t>What vegetation does he see near Garoua?</a:t>
             </a:r>
             <a:endParaRPr lang="en-US" sz="4000" dirty="0"/>
           </a:p>
@@ -8649,7 +8827,7 @@
                 <a:ea typeface="Times New Roman" pitchFamily="34" charset="-122"/>
                 <a:cs typeface="Times New Roman" pitchFamily="34" charset="-120"/>
               </a:rPr>
-              <a:t>The vegetation zones of Cameroon.</a:t>
+              <a:t>The vegetation of Cameroon.</a:t>
             </a:r>
             <a:endParaRPr lang="en-US" sz="1800" dirty="0"/>
           </a:p>
@@ -9463,7 +9641,7 @@
                 <a:ea typeface="Times New Roman" pitchFamily="34" charset="-122"/>
                 <a:cs typeface="Times New Roman" pitchFamily="34" charset="-120"/>
               </a:rPr>
-              <a:t>Name the two main natural regions of Cameroon and where they are found.</a:t>
+              <a:t>Where is the forest found in Cameroon, and where is the savanna found?</a:t>
             </a:r>
             <a:endParaRPr lang="en-US" sz="4000" dirty="0"/>
           </a:p>
@@ -9682,7 +9860,7 @@
                 <a:ea typeface="Times New Roman" pitchFamily="34" charset="-122"/>
                 <a:cs typeface="Times New Roman" pitchFamily="34" charset="-120"/>
               </a:rPr>
-              <a:t>The equatorial region in the south and the tropical region in the north.</a:t>
+              <a:t>The forest is in the south, and the savanna is in the north.</a:t>
             </a:r>
             <a:endParaRPr lang="en-US" sz="4000" dirty="0"/>
           </a:p>
@@ -9794,7 +9972,7 @@
                 <a:ea typeface="Calibri" pitchFamily="34" charset="-122"/>
                 <a:cs typeface="Calibri" pitchFamily="34" charset="-120"/>
               </a:rPr>
-              <a:t>2. THE EQUATORIAL REGION</a:t>
+              <a:t>1. THE EQUATORIAL REGION</a:t>
             </a:r>
             <a:endParaRPr lang="en-US" sz="1400" dirty="0"/>
           </a:p>
@@ -10008,7 +10186,7 @@
                 <a:ea typeface="Calibri" pitchFamily="34" charset="-122"/>
                 <a:cs typeface="Calibri" pitchFamily="34" charset="-120"/>
               </a:rPr>
-              <a:t>2. THE EQUATORIAL REGION</a:t>
+              <a:t>1. THE EQUATORIAL REGION</a:t>
             </a:r>
             <a:endParaRPr lang="en-US" sz="1400" dirty="0"/>
           </a:p>
@@ -10115,7 +10293,7 @@
                 <a:ea typeface="Times New Roman" pitchFamily="34" charset="-122"/>
                 <a:cs typeface="Times New Roman" pitchFamily="34" charset="-120"/>
               </a:rPr>
-              <a:t>Describe the climate of Yaoundé.</a:t>
+              <a:t>In how many months does it rain in Yaoundé?</a:t>
             </a:r>
             <a:endParaRPr lang="en-US" sz="4000" dirty="0"/>
           </a:p>
@@ -10227,7 +10405,7 @@
                 <a:ea typeface="Calibri" pitchFamily="34" charset="-122"/>
                 <a:cs typeface="Calibri" pitchFamily="34" charset="-120"/>
               </a:rPr>
-              <a:t>2. THE EQUATORIAL REGION</a:t>
+              <a:t>1. THE EQUATORIAL REGION</a:t>
             </a:r>
             <a:endParaRPr lang="en-US" sz="1400" dirty="0"/>
           </a:p>
@@ -10334,7 +10512,7 @@
                 <a:ea typeface="Times New Roman" pitchFamily="34" charset="-122"/>
                 <a:cs typeface="Times New Roman" pitchFamily="34" charset="-120"/>
               </a:rPr>
-              <a:t>It is hot all year (about 24 °C) and it rains in almost every month.</a:t>
+              <a:t>In almost every month of the year.</a:t>
             </a:r>
             <a:endParaRPr lang="en-US" sz="4000" dirty="0"/>
           </a:p>
@@ -10446,7 +10624,7 @@
                 <a:ea typeface="Calibri" pitchFamily="34" charset="-122"/>
                 <a:cs typeface="Calibri" pitchFamily="34" charset="-120"/>
               </a:rPr>
-              <a:t>2. THE EQUATORIAL REGION</a:t>
+              <a:t>1. THE EQUATORIAL REGION</a:t>
             </a:r>
             <a:endParaRPr lang="en-US" sz="1400" dirty="0"/>
           </a:p>
@@ -10660,7 +10838,7 @@
                 <a:ea typeface="Calibri" pitchFamily="34" charset="-122"/>
                 <a:cs typeface="Calibri" pitchFamily="34" charset="-120"/>
               </a:rPr>
-              <a:t>2. THE EQUATORIAL REGION</a:t>
+              <a:t>1. THE EQUATORIAL REGION</a:t>
             </a:r>
             <a:endParaRPr lang="en-US" sz="1400" dirty="0"/>
           </a:p>
@@ -10767,7 +10945,7 @@
                 <a:ea typeface="Times New Roman" pitchFamily="34" charset="-122"/>
                 <a:cs typeface="Times New Roman" pitchFamily="34" charset="-120"/>
               </a:rPr>
-              <a:t>Describe the vegetation and the soil of the equatorial region.</a:t>
+              <a:t>Why is the forest of the south always green?</a:t>
             </a:r>
             <a:endParaRPr lang="en-US" sz="4000" dirty="0"/>
           </a:p>
@@ -10879,7 +11057,7 @@
                 <a:ea typeface="Calibri" pitchFamily="34" charset="-122"/>
                 <a:cs typeface="Calibri" pitchFamily="34" charset="-120"/>
               </a:rPr>
-              <a:t>2. THE EQUATORIAL REGION</a:t>
+              <a:t>1. THE EQUATORIAL REGION</a:t>
             </a:r>
             <a:endParaRPr lang="en-US" sz="1400" dirty="0"/>
           </a:p>
@@ -10986,7 +11164,7 @@
                 <a:ea typeface="Times New Roman" pitchFamily="34" charset="-122"/>
                 <a:cs typeface="Times New Roman" pitchFamily="34" charset="-120"/>
               </a:rPr>
-              <a:t>A thick evergreen rainforest on red ferrallitic soils.</a:t>
+              <a:t>Because it is hot and it rains in almost every month.</a:t>
             </a:r>
             <a:endParaRPr lang="en-US" sz="4000" dirty="0"/>
           </a:p>
@@ -11098,7 +11276,7 @@
                 <a:ea typeface="Calibri" pitchFamily="34" charset="-122"/>
                 <a:cs typeface="Calibri" pitchFamily="34" charset="-120"/>
               </a:rPr>
-              <a:t>3. THE TROPICAL REGION</a:t>
+              <a:t>2. THE TROPICAL REGION</a:t>
             </a:r>
             <a:endParaRPr lang="en-US" sz="1400" dirty="0"/>
           </a:p>
@@ -11312,7 +11490,7 @@
                 <a:ea typeface="Calibri" pitchFamily="34" charset="-122"/>
                 <a:cs typeface="Calibri" pitchFamily="34" charset="-120"/>
               </a:rPr>
-              <a:t>3. THE TROPICAL REGION</a:t>
+              <a:t>2. THE TROPICAL REGION</a:t>
             </a:r>
             <a:endParaRPr lang="en-US" sz="1400" dirty="0"/>
           </a:p>
@@ -12102,7 +12280,7 @@
                           <a:ea typeface="Calibri" pitchFamily="34" charset="-122"/>
                           <a:cs typeface="Calibri" pitchFamily="34" charset="-120"/>
                         </a:rPr>
-                        <a:t>Natural region, rainforest, ferrallitic soil, savanna, ferruginous soil, Sahel.</a:t>
+                        <a:t>Rainforest, ferrallitic soil, savanna, ferruginous soil, Sahel.</a:t>
                       </a:r>
                       <a:endParaRPr lang="en-US" sz="1700" dirty="0">
                         <a:latin typeface="Calibri" charset="0"/>
@@ -12240,7 +12418,7 @@
                           <a:ea typeface="Calibri" pitchFamily="34" charset="-122"/>
                           <a:cs typeface="Calibri" pitchFamily="34" charset="-120"/>
                         </a:rPr>
-                        <a:t>The equatorial region and the tropical region of Cameroon: location and characteristics of climate, vegetation and soil.</a:t>
+                        <a:t>The equatorial region; the tropical region (location and characteristics of climate, vegetation and soil).</a:t>
                       </a:r>
                       <a:endParaRPr lang="en-US" sz="1700" dirty="0">
                         <a:latin typeface="Calibri" charset="0"/>
@@ -12540,7 +12718,7 @@
                 <a:ea typeface="Calibri" pitchFamily="34" charset="-122"/>
                 <a:cs typeface="Calibri" pitchFamily="34" charset="-120"/>
               </a:rPr>
-              <a:t>3. THE TROPICAL REGION</a:t>
+              <a:t>2. THE TROPICAL REGION</a:t>
             </a:r>
             <a:endParaRPr lang="en-US" sz="1400" dirty="0"/>
           </a:p>
@@ -12647,7 +12825,7 @@
                 <a:ea typeface="Times New Roman" pitchFamily="34" charset="-122"/>
                 <a:cs typeface="Times New Roman" pitchFamily="34" charset="-120"/>
               </a:rPr>
-              <a:t>Two: a rainy season (May–October) and a long dry season.</a:t>
+              <a:t>Two: a rainy season (May to October) and a long dry season.</a:t>
             </a:r>
             <a:endParaRPr lang="en-US" sz="4000" dirty="0"/>
           </a:p>
@@ -12759,7 +12937,7 @@
                 <a:ea typeface="Calibri" pitchFamily="34" charset="-122"/>
                 <a:cs typeface="Calibri" pitchFamily="34" charset="-120"/>
               </a:rPr>
-              <a:t>3. THE TROPICAL REGION</a:t>
+              <a:t>2. THE TROPICAL REGION</a:t>
             </a:r>
             <a:endParaRPr lang="en-US" sz="1400" dirty="0"/>
           </a:p>
@@ -12973,7 +13151,7 @@
                 <a:ea typeface="Calibri" pitchFamily="34" charset="-122"/>
                 <a:cs typeface="Calibri" pitchFamily="34" charset="-120"/>
               </a:rPr>
-              <a:t>3. THE TROPICAL REGION</a:t>
+              <a:t>2. THE TROPICAL REGION</a:t>
             </a:r>
             <a:endParaRPr lang="en-US" sz="1400" dirty="0"/>
           </a:p>
@@ -13080,7 +13258,7 @@
                 <a:ea typeface="Times New Roman" pitchFamily="34" charset="-122"/>
                 <a:cs typeface="Times New Roman" pitchFamily="34" charset="-120"/>
               </a:rPr>
-              <a:t>Describe the vegetation and the soil of the tropical region.</a:t>
+              <a:t>Why are there fewer trees in the north than in the south?</a:t>
             </a:r>
             <a:endParaRPr lang="en-US" sz="4000" dirty="0"/>
           </a:p>
@@ -13192,7 +13370,7 @@
                 <a:ea typeface="Calibri" pitchFamily="34" charset="-122"/>
                 <a:cs typeface="Calibri" pitchFamily="34" charset="-120"/>
               </a:rPr>
-              <a:t>3. THE TROPICAL REGION</a:t>
+              <a:t>2. THE TROPICAL REGION</a:t>
             </a:r>
             <a:endParaRPr lang="en-US" sz="1400" dirty="0"/>
           </a:p>
@@ -13299,7 +13477,7 @@
                 <a:ea typeface="Times New Roman" pitchFamily="34" charset="-122"/>
                 <a:cs typeface="Times New Roman" pitchFamily="34" charset="-120"/>
               </a:rPr>
-              <a:t>Savanna of grass with scattered trees, becoming Sahel (steppe) in the far north, on ferruginous soils.</a:t>
+              <a:t>Because there is less rain and a long dry season.</a:t>
             </a:r>
             <a:endParaRPr lang="en-US" sz="4000" dirty="0"/>
           </a:p>
@@ -13797,7 +13975,7 @@
                 <a:ea typeface="Times New Roman" pitchFamily="34" charset="-122"/>
                 <a:cs typeface="Times New Roman" pitchFamily="34" charset="-120"/>
               </a:rPr>
-              <a:t>Natural region: </a:t>
+              <a:t>Natural region (bio-climatic zone): </a:t>
             </a:r>
             <a:pPr algn="l" indent="0" marL="0">
               <a:spcAft>
@@ -13932,9 +14110,129 @@
           </a:p>
         </p:txBody>
       </p:sp>
+      <p:sp>
+        <p:nvSpPr>
+          <p:cNvPr id="3" name="Text 1"/>
+          <p:cNvSpPr/>
+          <p:nvPr/>
+        </p:nvSpPr>
+        <p:spPr>
+          <a:xfrm>
+            <a:off x="365760" y="1005840"/>
+            <a:ext cx="11460175" cy="731520"/>
+          </a:xfrm>
+          <a:prstGeom prst="rect">
+            <a:avLst/>
+          </a:prstGeom>
+          <a:noFill/>
+          <a:ln/>
+        </p:spPr>
+        <p:txBody>
+          <a:bodyPr wrap="square" lIns="0" tIns="0" rIns="0" bIns="0" rtlCol="0" anchor="ctr">
+            <a:normAutofit/>
+          </a:bodyPr>
+          <a:lstStyle/>
+          <a:p>
+            <a:pPr algn="ctr" indent="0" marL="0">
+              <a:buNone/>
+            </a:pPr>
+            <a:r>
+              <a:rPr lang="en-US" sz="3600" b="1" dirty="0">
+                <a:solidFill>
+                  <a:srgbClr val="990011"/>
+                </a:solidFill>
+                <a:latin typeface="Times New Roman" pitchFamily="34" charset="0"/>
+                <a:ea typeface="Times New Roman" pitchFamily="34" charset="-122"/>
+                <a:cs typeface="Times New Roman" pitchFamily="34" charset="-120"/>
+              </a:rPr>
+              <a:t>1. The Equatorial Region</a:t>
+            </a:r>
+            <a:endParaRPr lang="en-US" sz="3600" dirty="0"/>
+          </a:p>
+        </p:txBody>
+      </p:sp>
+      <p:sp>
+        <p:nvSpPr>
+          <p:cNvPr id="4" name="Text 2"/>
+          <p:cNvSpPr/>
+          <p:nvPr/>
+        </p:nvSpPr>
+        <p:spPr>
+          <a:xfrm>
+            <a:off x="365760" y="1783080"/>
+            <a:ext cx="4846320" cy="4617720"/>
+          </a:xfrm>
+          <a:prstGeom prst="rect">
+            <a:avLst/>
+          </a:prstGeom>
+          <a:noFill/>
+          <a:ln/>
+        </p:spPr>
+        <p:txBody>
+          <a:bodyPr wrap="square" lIns="0" tIns="0" rIns="0" bIns="0" rtlCol="0" anchor="t"/>
+          <a:lstStyle/>
+          <a:p>
+            <a:pPr algn="l" indent="0" marL="0">
+              <a:spcAft>
+                <a:spcPts val="800"/>
+              </a:spcAft>
+              <a:buNone/>
+            </a:pPr>
+            <a:r>
+              <a:rPr lang="en-US" sz="3200" i="1" dirty="0">
+                <a:solidFill>
+                  <a:srgbClr val="111111"/>
+                </a:solidFill>
+                <a:latin typeface="Times New Roman" pitchFamily="34" charset="0"/>
+                <a:ea typeface="Times New Roman" pitchFamily="34" charset="-122"/>
+                <a:cs typeface="Times New Roman" pitchFamily="34" charset="-120"/>
+              </a:rPr>
+              <a:t>The equatorial region of southern Cameroon has the following characteristics:</a:t>
+            </a:r>
+            <a:endParaRPr lang="en-US" sz="3200" dirty="0"/>
+          </a:p>
+          <a:p>
+            <a:pPr algn="l" indent="0" marL="0">
+              <a:spcAft>
+                <a:spcPts val="800"/>
+              </a:spcAft>
+              <a:buNone/>
+            </a:pPr>
+            <a:r>
+              <a:rPr lang="en-US" sz="3200" b="1" dirty="0">
+                <a:solidFill>
+                  <a:srgbClr val="111111"/>
+                </a:solidFill>
+                <a:latin typeface="Times New Roman" pitchFamily="34" charset="0"/>
+                <a:ea typeface="Times New Roman" pitchFamily="34" charset="-122"/>
+                <a:cs typeface="Times New Roman" pitchFamily="34" charset="-120"/>
+              </a:rPr>
+              <a:t>Location: </a:t>
+            </a:r>
+            <a:pPr algn="l" indent="0" marL="0">
+              <a:spcAft>
+                <a:spcPts val="800"/>
+              </a:spcAft>
+              <a:buNone/>
+            </a:pPr>
+            <a:r>
+              <a:rPr lang="en-US" sz="3200" dirty="0">
+                <a:solidFill>
+                  <a:srgbClr val="111111"/>
+                </a:solidFill>
+                <a:latin typeface="Times New Roman" pitchFamily="34" charset="0"/>
+                <a:ea typeface="Times New Roman" pitchFamily="34" charset="-122"/>
+                <a:cs typeface="Times New Roman" pitchFamily="34" charset="-120"/>
+              </a:rPr>
+              <a:t>It covers the South, Centre, East, Littoral and South-West Regions, south of about 6° N.</a:t>
+            </a:r>
+            <a:endParaRPr lang="en-US" sz="3200" dirty="0"/>
+          </a:p>
+        </p:txBody>
+      </p:sp>
       <p:pic>
         <p:nvPicPr>
-          <p:cNvPr id="3" name="Image 0" descr="/home/claude/f4/img/minesec_sheet.png">    </p:cNvPr>
+          <p:cNvPr id="5" name="Image 0" descr="/home/claude/f4/img/v2/cameroon_veg_big.png">    </p:cNvPr>
           <p:cNvPicPr>
             <a:picLocks noChangeAspect="1"/>
           </p:cNvPicPr>
@@ -13948,8 +14246,8 @@
         </p:blipFill>
         <p:spPr>
           <a:xfrm>
-            <a:off x="0" y="658368"/>
-            <a:ext cx="1463040" cy="5833872"/>
+            <a:off x="5349240" y="2253310"/>
+            <a:ext cx="6659575" cy="3329788"/>
           </a:xfrm>
           <a:prstGeom prst="rect">
             <a:avLst/>
@@ -13958,14 +14256,14 @@
       </p:pic>
       <p:sp>
         <p:nvSpPr>
-          <p:cNvPr id="4" name="Text 1"/>
+          <p:cNvPr id="6" name="Text 3"/>
           <p:cNvSpPr/>
           <p:nvPr/>
         </p:nvSpPr>
         <p:spPr>
           <a:xfrm>
-            <a:off x="1691640" y="1005840"/>
-            <a:ext cx="10180015" cy="731520"/>
+            <a:off x="5349240" y="6089904"/>
+            <a:ext cx="6659575" cy="347472"/>
           </a:xfrm>
           <a:prstGeom prst="rect">
             <a:avLst/>
@@ -13974,142 +14272,24 @@
           <a:ln/>
         </p:spPr>
         <p:txBody>
-          <a:bodyPr wrap="square" lIns="0" tIns="0" rIns="0" bIns="0" rtlCol="0" anchor="ctr">
-            <a:normAutofit/>
-          </a:bodyPr>
+          <a:bodyPr wrap="square" lIns="0" tIns="0" rIns="0" bIns="0" rtlCol="0" anchor="ctr"/>
           <a:lstStyle/>
           <a:p>
             <a:pPr algn="ctr" indent="0" marL="0">
               <a:buNone/>
             </a:pPr>
             <a:r>
-              <a:rPr lang="en-US" sz="3600" b="1" dirty="0">
-                <a:solidFill>
-                  <a:srgbClr val="990011"/>
+              <a:rPr lang="en-US" sz="1600" i="1" dirty="0">
+                <a:solidFill>
+                  <a:srgbClr val="555555"/>
                 </a:solidFill>
                 <a:latin typeface="Times New Roman" pitchFamily="34" charset="0"/>
                 <a:ea typeface="Times New Roman" pitchFamily="34" charset="-122"/>
                 <a:cs typeface="Times New Roman" pitchFamily="34" charset="-120"/>
               </a:rPr>
-              <a:t>1. The Equatorial Region</a:t>
-            </a:r>
-            <a:endParaRPr lang="en-US" sz="3600" dirty="0"/>
-          </a:p>
-        </p:txBody>
-      </p:sp>
-      <p:sp>
-        <p:nvSpPr>
-          <p:cNvPr id="5" name="Text 2"/>
-          <p:cNvSpPr/>
-          <p:nvPr/>
-        </p:nvSpPr>
-        <p:spPr>
-          <a:xfrm>
-            <a:off x="1691640" y="1783080"/>
-            <a:ext cx="10180015" cy="4663440"/>
-          </a:xfrm>
-          <a:prstGeom prst="rect">
-            <a:avLst/>
-          </a:prstGeom>
-          <a:noFill/>
-          <a:ln/>
-        </p:spPr>
-        <p:txBody>
-          <a:bodyPr wrap="square" lIns="0" tIns="0" rIns="0" bIns="0" rtlCol="0" anchor="t"/>
-          <a:lstStyle/>
-          <a:p>
-            <a:pPr algn="l" indent="0" marL="0">
-              <a:spcAft>
-                <a:spcPts val="800"/>
-              </a:spcAft>
-              <a:buNone/>
-            </a:pPr>
-            <a:r>
-              <a:rPr lang="en-US" sz="4000" i="1" dirty="0">
-                <a:solidFill>
-                  <a:srgbClr val="111111"/>
-                </a:solidFill>
-                <a:latin typeface="Times New Roman" pitchFamily="34" charset="0"/>
-                <a:ea typeface="Times New Roman" pitchFamily="34" charset="-122"/>
-                <a:cs typeface="Times New Roman" pitchFamily="34" charset="-120"/>
-              </a:rPr>
-              <a:t>The equatorial region of southern Cameroon has the following characteristics:</a:t>
-            </a:r>
-            <a:endParaRPr lang="en-US" sz="4000" dirty="0"/>
-          </a:p>
-          <a:p>
-            <a:pPr algn="l" indent="0" marL="0">
-              <a:spcAft>
-                <a:spcPts val="800"/>
-              </a:spcAft>
-              <a:buNone/>
-            </a:pPr>
-            <a:r>
-              <a:rPr lang="en-US" sz="4000" b="1" dirty="0">
-                <a:solidFill>
-                  <a:srgbClr val="111111"/>
-                </a:solidFill>
-                <a:latin typeface="Times New Roman" pitchFamily="34" charset="0"/>
-                <a:ea typeface="Times New Roman" pitchFamily="34" charset="-122"/>
-                <a:cs typeface="Times New Roman" pitchFamily="34" charset="-120"/>
-              </a:rPr>
-              <a:t>Location: </a:t>
-            </a:r>
-            <a:pPr algn="l" indent="0" marL="0">
-              <a:spcAft>
-                <a:spcPts val="800"/>
-              </a:spcAft>
-              <a:buNone/>
-            </a:pPr>
-            <a:r>
-              <a:rPr lang="en-US" sz="4000" dirty="0">
-                <a:solidFill>
-                  <a:srgbClr val="111111"/>
-                </a:solidFill>
-                <a:latin typeface="Times New Roman" pitchFamily="34" charset="0"/>
-                <a:ea typeface="Times New Roman" pitchFamily="34" charset="-122"/>
-                <a:cs typeface="Times New Roman" pitchFamily="34" charset="-120"/>
-              </a:rPr>
-              <a:t>It covers the South, Centre, East and Littoral Regions, south of about 6° N.</a:t>
-            </a:r>
-            <a:endParaRPr lang="en-US" sz="4000" dirty="0"/>
-          </a:p>
-          <a:p>
-            <a:pPr algn="l" indent="0" marL="0">
-              <a:spcAft>
-                <a:spcPts val="800"/>
-              </a:spcAft>
-              <a:buNone/>
-            </a:pPr>
-            <a:r>
-              <a:rPr lang="en-US" sz="4000" b="1" dirty="0">
-                <a:solidFill>
-                  <a:srgbClr val="111111"/>
-                </a:solidFill>
-                <a:latin typeface="Times New Roman" pitchFamily="34" charset="0"/>
-                <a:ea typeface="Times New Roman" pitchFamily="34" charset="-122"/>
-                <a:cs typeface="Times New Roman" pitchFamily="34" charset="-120"/>
-              </a:rPr>
-              <a:t>Climate: </a:t>
-            </a:r>
-            <a:pPr algn="l" indent="0" marL="0">
-              <a:spcAft>
-                <a:spcPts val="800"/>
-              </a:spcAft>
-              <a:buNone/>
-            </a:pPr>
-            <a:r>
-              <a:rPr lang="en-US" sz="4000" dirty="0">
-                <a:solidFill>
-                  <a:srgbClr val="111111"/>
-                </a:solidFill>
-                <a:latin typeface="Times New Roman" pitchFamily="34" charset="0"/>
-                <a:ea typeface="Times New Roman" pitchFamily="34" charset="-122"/>
-                <a:cs typeface="Times New Roman" pitchFamily="34" charset="-120"/>
-              </a:rPr>
-              <a:t>It is hot all year with heavy rain in almost every month.</a:t>
-            </a:r>
-            <a:endParaRPr lang="en-US" sz="4000" dirty="0"/>
+              <a:t>Illustration: the natural regions of Cameroon</a:t>
+            </a:r>
+            <a:endParaRPr lang="en-US" sz="1600" dirty="0"/>
           </a:p>
         </p:txBody>
       </p:sp>
@@ -14225,9 +14405,109 @@
           </a:p>
         </p:txBody>
       </p:sp>
+      <p:sp>
+        <p:nvSpPr>
+          <p:cNvPr id="3" name="Text 1"/>
+          <p:cNvSpPr/>
+          <p:nvPr/>
+        </p:nvSpPr>
+        <p:spPr>
+          <a:xfrm>
+            <a:off x="365760" y="1005840"/>
+            <a:ext cx="11460175" cy="731520"/>
+          </a:xfrm>
+          <a:prstGeom prst="rect">
+            <a:avLst/>
+          </a:prstGeom>
+          <a:noFill/>
+          <a:ln/>
+        </p:spPr>
+        <p:txBody>
+          <a:bodyPr wrap="square" lIns="0" tIns="0" rIns="0" bIns="0" rtlCol="0" anchor="ctr">
+            <a:normAutofit/>
+          </a:bodyPr>
+          <a:lstStyle/>
+          <a:p>
+            <a:pPr algn="ctr" indent="0" marL="0">
+              <a:buNone/>
+            </a:pPr>
+            <a:r>
+              <a:rPr lang="en-US" sz="3600" b="1" dirty="0">
+                <a:solidFill>
+                  <a:srgbClr val="990011"/>
+                </a:solidFill>
+                <a:latin typeface="Times New Roman" pitchFamily="34" charset="0"/>
+                <a:ea typeface="Times New Roman" pitchFamily="34" charset="-122"/>
+                <a:cs typeface="Times New Roman" pitchFamily="34" charset="-120"/>
+              </a:rPr>
+              <a:t>1. The Equatorial Region</a:t>
+            </a:r>
+            <a:endParaRPr lang="en-US" sz="3600" dirty="0"/>
+          </a:p>
+        </p:txBody>
+      </p:sp>
+      <p:sp>
+        <p:nvSpPr>
+          <p:cNvPr id="4" name="Text 2"/>
+          <p:cNvSpPr/>
+          <p:nvPr/>
+        </p:nvSpPr>
+        <p:spPr>
+          <a:xfrm>
+            <a:off x="365760" y="1783080"/>
+            <a:ext cx="4846320" cy="4617720"/>
+          </a:xfrm>
+          <a:prstGeom prst="rect">
+            <a:avLst/>
+          </a:prstGeom>
+          <a:noFill/>
+          <a:ln/>
+        </p:spPr>
+        <p:txBody>
+          <a:bodyPr wrap="square" lIns="0" tIns="0" rIns="0" bIns="0" rtlCol="0" anchor="t"/>
+          <a:lstStyle/>
+          <a:p>
+            <a:pPr algn="l" indent="0" marL="0">
+              <a:spcAft>
+                <a:spcPts val="800"/>
+              </a:spcAft>
+              <a:buNone/>
+            </a:pPr>
+            <a:r>
+              <a:rPr lang="en-US" sz="3600" b="1" dirty="0">
+                <a:solidFill>
+                  <a:srgbClr val="111111"/>
+                </a:solidFill>
+                <a:latin typeface="Times New Roman" pitchFamily="34" charset="0"/>
+                <a:ea typeface="Times New Roman" pitchFamily="34" charset="-122"/>
+                <a:cs typeface="Times New Roman" pitchFamily="34" charset="-120"/>
+              </a:rPr>
+              <a:t>Climate: </a:t>
+            </a:r>
+            <a:pPr algn="l" indent="0" marL="0">
+              <a:spcAft>
+                <a:spcPts val="800"/>
+              </a:spcAft>
+              <a:buNone/>
+            </a:pPr>
+            <a:r>
+              <a:rPr lang="en-US" sz="3600" dirty="0">
+                <a:solidFill>
+                  <a:srgbClr val="111111"/>
+                </a:solidFill>
+                <a:latin typeface="Times New Roman" pitchFamily="34" charset="0"/>
+                <a:ea typeface="Times New Roman" pitchFamily="34" charset="-122"/>
+                <a:cs typeface="Times New Roman" pitchFamily="34" charset="-120"/>
+              </a:rPr>
+              <a:t>It is hot all year (about 25 °C), with heavy rain in almost every month.</a:t>
+            </a:r>
+            <a:endParaRPr lang="en-US" sz="3600" dirty="0"/>
+          </a:p>
+        </p:txBody>
+      </p:sp>
       <p:pic>
         <p:nvPicPr>
-          <p:cNvPr id="3" name="Image 0" descr="/home/claude/f4/img/minesec_sheet.png">    </p:cNvPr>
+          <p:cNvPr id="5" name="Image 0" descr="/home/claude/f4/img/v2/yaounde_climate_big.png">    </p:cNvPr>
           <p:cNvPicPr>
             <a:picLocks noChangeAspect="1"/>
           </p:cNvPicPr>
@@ -14241,8 +14521,8 @@
         </p:blipFill>
         <p:spPr>
           <a:xfrm>
-            <a:off x="0" y="658368"/>
-            <a:ext cx="5120640" cy="5833872"/>
+            <a:off x="5349240" y="2461422"/>
+            <a:ext cx="6659575" cy="2913564"/>
           </a:xfrm>
           <a:prstGeom prst="rect">
             <a:avLst/>
@@ -14251,14 +14531,14 @@
       </p:pic>
       <p:sp>
         <p:nvSpPr>
-          <p:cNvPr id="4" name="Text 1"/>
+          <p:cNvPr id="6" name="Text 3"/>
           <p:cNvSpPr/>
           <p:nvPr/>
         </p:nvSpPr>
         <p:spPr>
           <a:xfrm>
-            <a:off x="5349240" y="1005840"/>
-            <a:ext cx="6522415" cy="731520"/>
+            <a:off x="5349240" y="6089904"/>
+            <a:ext cx="6659575" cy="347472"/>
           </a:xfrm>
           <a:prstGeom prst="rect">
             <a:avLst/>
@@ -14267,122 +14547,24 @@
           <a:ln/>
         </p:spPr>
         <p:txBody>
-          <a:bodyPr wrap="square" lIns="0" tIns="0" rIns="0" bIns="0" rtlCol="0" anchor="ctr">
-            <a:normAutofit/>
-          </a:bodyPr>
+          <a:bodyPr wrap="square" lIns="0" tIns="0" rIns="0" bIns="0" rtlCol="0" anchor="ctr"/>
           <a:lstStyle/>
           <a:p>
             <a:pPr algn="ctr" indent="0" marL="0">
               <a:buNone/>
             </a:pPr>
             <a:r>
-              <a:rPr lang="en-US" sz="3600" b="1" dirty="0">
-                <a:solidFill>
-                  <a:srgbClr val="990011"/>
+              <a:rPr lang="en-US" sz="1600" i="1" dirty="0">
+                <a:solidFill>
+                  <a:srgbClr val="555555"/>
                 </a:solidFill>
                 <a:latin typeface="Times New Roman" pitchFamily="34" charset="0"/>
                 <a:ea typeface="Times New Roman" pitchFamily="34" charset="-122"/>
                 <a:cs typeface="Times New Roman" pitchFamily="34" charset="-120"/>
               </a:rPr>
-              <a:t>1. The Equatorial Region (continued)</a:t>
-            </a:r>
-            <a:endParaRPr lang="en-US" sz="3600" dirty="0"/>
-          </a:p>
-        </p:txBody>
-      </p:sp>
-      <p:sp>
-        <p:nvSpPr>
-          <p:cNvPr id="5" name="Text 2"/>
-          <p:cNvSpPr/>
-          <p:nvPr/>
-        </p:nvSpPr>
-        <p:spPr>
-          <a:xfrm>
-            <a:off x="5349240" y="1783080"/>
-            <a:ext cx="6522415" cy="4663440"/>
-          </a:xfrm>
-          <a:prstGeom prst="rect">
-            <a:avLst/>
-          </a:prstGeom>
-          <a:noFill/>
-          <a:ln/>
-        </p:spPr>
-        <p:txBody>
-          <a:bodyPr wrap="square" lIns="0" tIns="0" rIns="0" bIns="0" rtlCol="0" anchor="t"/>
-          <a:lstStyle/>
-          <a:p>
-            <a:pPr algn="l" indent="0" marL="0">
-              <a:spcAft>
-                <a:spcPts val="800"/>
-              </a:spcAft>
-              <a:buNone/>
-            </a:pPr>
-            <a:r>
-              <a:rPr lang="en-US" sz="4000" b="1" dirty="0">
-                <a:solidFill>
-                  <a:srgbClr val="111111"/>
-                </a:solidFill>
-                <a:latin typeface="Times New Roman" pitchFamily="34" charset="0"/>
-                <a:ea typeface="Times New Roman" pitchFamily="34" charset="-122"/>
-                <a:cs typeface="Times New Roman" pitchFamily="34" charset="-120"/>
-              </a:rPr>
-              <a:t>Vegetation: </a:t>
-            </a:r>
-            <a:pPr algn="l" indent="0" marL="0">
-              <a:spcAft>
-                <a:spcPts val="800"/>
-              </a:spcAft>
-              <a:buNone/>
-            </a:pPr>
-            <a:r>
-              <a:rPr lang="en-US" sz="4000" dirty="0">
-                <a:solidFill>
-                  <a:srgbClr val="111111"/>
-                </a:solidFill>
-                <a:latin typeface="Times New Roman" pitchFamily="34" charset="0"/>
-                <a:ea typeface="Times New Roman" pitchFamily="34" charset="-122"/>
-                <a:cs typeface="Times New Roman" pitchFamily="34" charset="-120"/>
-              </a:rPr>
-              <a:t>It is covered by a thick evergreen rainforest.</a:t>
-            </a:r>
-            <a:endParaRPr lang="en-US" sz="4000" dirty="0"/>
-          </a:p>
-          <a:p>
-            <a:pPr algn="l" indent="0" marL="0">
-              <a:spcAft>
-                <a:spcPts val="800"/>
-              </a:spcAft>
-              <a:buNone/>
-            </a:pPr>
-            <a:r>
-              <a:rPr lang="en-US" sz="4000" b="1" dirty="0">
-                <a:solidFill>
-                  <a:srgbClr val="111111"/>
-                </a:solidFill>
-                <a:latin typeface="Times New Roman" pitchFamily="34" charset="0"/>
-                <a:ea typeface="Times New Roman" pitchFamily="34" charset="-122"/>
-                <a:cs typeface="Times New Roman" pitchFamily="34" charset="-120"/>
-              </a:rPr>
-              <a:t>Soil: </a:t>
-            </a:r>
-            <a:pPr algn="l" indent="0" marL="0">
-              <a:spcAft>
-                <a:spcPts val="800"/>
-              </a:spcAft>
-              <a:buNone/>
-            </a:pPr>
-            <a:r>
-              <a:rPr lang="en-US" sz="4000" dirty="0">
-                <a:solidFill>
-                  <a:srgbClr val="111111"/>
-                </a:solidFill>
-                <a:latin typeface="Times New Roman" pitchFamily="34" charset="0"/>
-                <a:ea typeface="Times New Roman" pitchFamily="34" charset="-122"/>
-                <a:cs typeface="Times New Roman" pitchFamily="34" charset="-120"/>
-              </a:rPr>
-              <a:t>The soils are red ferrallitic soils, washed by heavy rain.</a:t>
-            </a:r>
-            <a:endParaRPr lang="en-US" sz="4000" dirty="0"/>
+              <a:t>Illustration: the climate of Yaoundé</a:t>
+            </a:r>
+            <a:endParaRPr lang="en-US" sz="1600" dirty="0"/>
           </a:p>
         </p:txBody>
       </p:sp>
@@ -14506,8 +14688,8 @@
         </p:nvSpPr>
         <p:spPr>
           <a:xfrm>
-            <a:off x="457200" y="1005840"/>
-            <a:ext cx="11277295" cy="731520"/>
+            <a:off x="365760" y="1005840"/>
+            <a:ext cx="11460175" cy="731520"/>
           </a:xfrm>
           <a:prstGeom prst="rect">
             <a:avLst/>
@@ -14516,7 +14698,9 @@
           <a:ln/>
         </p:spPr>
         <p:txBody>
-          <a:bodyPr wrap="square" lIns="0" tIns="0" rIns="0" bIns="0" rtlCol="0" anchor="ctr"/>
+          <a:bodyPr wrap="square" lIns="0" tIns="0" rIns="0" bIns="0" rtlCol="0" anchor="ctr">
+            <a:normAutofit/>
+          </a:bodyPr>
           <a:lstStyle/>
           <a:p>
             <a:pPr algn="ctr" indent="0" marL="0">
@@ -14537,9 +14721,68 @@
           </a:p>
         </p:txBody>
       </p:sp>
+      <p:sp>
+        <p:nvSpPr>
+          <p:cNvPr id="4" name="Text 2"/>
+          <p:cNvSpPr/>
+          <p:nvPr/>
+        </p:nvSpPr>
+        <p:spPr>
+          <a:xfrm>
+            <a:off x="365760" y="1783080"/>
+            <a:ext cx="4846320" cy="4617720"/>
+          </a:xfrm>
+          <a:prstGeom prst="rect">
+            <a:avLst/>
+          </a:prstGeom>
+          <a:noFill/>
+          <a:ln/>
+        </p:spPr>
+        <p:txBody>
+          <a:bodyPr wrap="square" lIns="0" tIns="0" rIns="0" bIns="0" rtlCol="0" anchor="t"/>
+          <a:lstStyle/>
+          <a:p>
+            <a:pPr algn="l" indent="0" marL="0">
+              <a:spcAft>
+                <a:spcPts val="800"/>
+              </a:spcAft>
+              <a:buNone/>
+            </a:pPr>
+            <a:r>
+              <a:rPr lang="en-US" sz="3600" b="1" dirty="0">
+                <a:solidFill>
+                  <a:srgbClr val="111111"/>
+                </a:solidFill>
+                <a:latin typeface="Times New Roman" pitchFamily="34" charset="0"/>
+                <a:ea typeface="Times New Roman" pitchFamily="34" charset="-122"/>
+                <a:cs typeface="Times New Roman" pitchFamily="34" charset="-120"/>
+              </a:rPr>
+              <a:t>Vegetation: </a:t>
+            </a:r>
+            <a:pPr algn="l" indent="0" marL="0">
+              <a:spcAft>
+                <a:spcPts val="800"/>
+              </a:spcAft>
+              <a:buNone/>
+            </a:pPr>
+            <a:r>
+              <a:rPr lang="en-US" sz="3600" dirty="0">
+                <a:solidFill>
+                  <a:srgbClr val="111111"/>
+                </a:solidFill>
+                <a:latin typeface="Times New Roman" pitchFamily="34" charset="0"/>
+                <a:ea typeface="Times New Roman" pitchFamily="34" charset="-122"/>
+                <a:cs typeface="Times New Roman" pitchFamily="34" charset="-120"/>
+              </a:rPr>
+              <a:t>It is covered by a thick evergreen rainforest with tall trees.</a:t>
+            </a:r>
+            <a:endParaRPr lang="en-US" sz="3600" dirty="0"/>
+          </a:p>
+        </p:txBody>
+      </p:sp>
       <p:pic>
         <p:nvPicPr>
-          <p:cNvPr id="4" name="Image 0" descr="/home/claude/f4/img/v2/cameroon_veg_big.png">    </p:cNvPr>
+          <p:cNvPr id="5" name="Image 0" descr="/home/claude/f4/img/v2/f2t_rainforest.jpg">    </p:cNvPr>
           <p:cNvPicPr>
             <a:picLocks noChangeAspect="1"/>
           </p:cNvPicPr>
@@ -14553,8 +14796,8 @@
         </p:blipFill>
         <p:spPr>
           <a:xfrm>
-            <a:off x="1825600" y="1783080"/>
-            <a:ext cx="8540496" cy="4270248"/>
+            <a:off x="5349240" y="2071212"/>
+            <a:ext cx="6659575" cy="3693983"/>
           </a:xfrm>
           <a:prstGeom prst="rect">
             <a:avLst/>
@@ -14563,14 +14806,14 @@
       </p:pic>
       <p:sp>
         <p:nvSpPr>
-          <p:cNvPr id="5" name="Text 2"/>
+          <p:cNvPr id="6" name="Text 3"/>
           <p:cNvSpPr/>
           <p:nvPr/>
         </p:nvSpPr>
         <p:spPr>
           <a:xfrm>
-            <a:off x="457200" y="6089904"/>
-            <a:ext cx="11277295" cy="347472"/>
+            <a:off x="5349240" y="6089904"/>
+            <a:ext cx="6659575" cy="347472"/>
           </a:xfrm>
           <a:prstGeom prst="rect">
             <a:avLst/>
@@ -14586,7 +14829,7 @@
               <a:buNone/>
             </a:pPr>
             <a:r>
-              <a:rPr lang="en-US" sz="1800" i="1" dirty="0">
+              <a:rPr lang="en-US" sz="1600" i="1" dirty="0">
                 <a:solidFill>
                   <a:srgbClr val="555555"/>
                 </a:solidFill>
@@ -14594,9 +14837,9 @@
                 <a:ea typeface="Times New Roman" pitchFamily="34" charset="-122"/>
                 <a:cs typeface="Times New Roman" pitchFamily="34" charset="-120"/>
               </a:rPr>
-              <a:t>Illustration: the natural regions of Cameroon</a:t>
-            </a:r>
-            <a:endParaRPr lang="en-US" sz="1800" dirty="0"/>
+              <a:t>Illustration: the equatorial rainforest</a:t>
+            </a:r>
+            <a:endParaRPr lang="en-US" sz="1600" dirty="0"/>
           </a:p>
         </p:txBody>
       </p:sp>
@@ -14712,9 +14955,109 @@
           </a:p>
         </p:txBody>
       </p:sp>
+      <p:sp>
+        <p:nvSpPr>
+          <p:cNvPr id="3" name="Text 1"/>
+          <p:cNvSpPr/>
+          <p:nvPr/>
+        </p:nvSpPr>
+        <p:spPr>
+          <a:xfrm>
+            <a:off x="365760" y="1005840"/>
+            <a:ext cx="11460175" cy="731520"/>
+          </a:xfrm>
+          <a:prstGeom prst="rect">
+            <a:avLst/>
+          </a:prstGeom>
+          <a:noFill/>
+          <a:ln/>
+        </p:spPr>
+        <p:txBody>
+          <a:bodyPr wrap="square" lIns="0" tIns="0" rIns="0" bIns="0" rtlCol="0" anchor="ctr">
+            <a:normAutofit/>
+          </a:bodyPr>
+          <a:lstStyle/>
+          <a:p>
+            <a:pPr algn="ctr" indent="0" marL="0">
+              <a:buNone/>
+            </a:pPr>
+            <a:r>
+              <a:rPr lang="en-US" sz="3600" b="1" dirty="0">
+                <a:solidFill>
+                  <a:srgbClr val="990011"/>
+                </a:solidFill>
+                <a:latin typeface="Times New Roman" pitchFamily="34" charset="0"/>
+                <a:ea typeface="Times New Roman" pitchFamily="34" charset="-122"/>
+                <a:cs typeface="Times New Roman" pitchFamily="34" charset="-120"/>
+              </a:rPr>
+              <a:t>1. The Equatorial Region</a:t>
+            </a:r>
+            <a:endParaRPr lang="en-US" sz="3600" dirty="0"/>
+          </a:p>
+        </p:txBody>
+      </p:sp>
+      <p:sp>
+        <p:nvSpPr>
+          <p:cNvPr id="4" name="Text 2"/>
+          <p:cNvSpPr/>
+          <p:nvPr/>
+        </p:nvSpPr>
+        <p:spPr>
+          <a:xfrm>
+            <a:off x="365760" y="1783080"/>
+            <a:ext cx="4846320" cy="4617720"/>
+          </a:xfrm>
+          <a:prstGeom prst="rect">
+            <a:avLst/>
+          </a:prstGeom>
+          <a:noFill/>
+          <a:ln/>
+        </p:spPr>
+        <p:txBody>
+          <a:bodyPr wrap="square" lIns="0" tIns="0" rIns="0" bIns="0" rtlCol="0" anchor="t"/>
+          <a:lstStyle/>
+          <a:p>
+            <a:pPr algn="l" indent="0" marL="0">
+              <a:spcAft>
+                <a:spcPts val="800"/>
+              </a:spcAft>
+              <a:buNone/>
+            </a:pPr>
+            <a:r>
+              <a:rPr lang="en-US" sz="3600" b="1" dirty="0">
+                <a:solidFill>
+                  <a:srgbClr val="111111"/>
+                </a:solidFill>
+                <a:latin typeface="Times New Roman" pitchFamily="34" charset="0"/>
+                <a:ea typeface="Times New Roman" pitchFamily="34" charset="-122"/>
+                <a:cs typeface="Times New Roman" pitchFamily="34" charset="-120"/>
+              </a:rPr>
+              <a:t>Soil: </a:t>
+            </a:r>
+            <a:pPr algn="l" indent="0" marL="0">
+              <a:spcAft>
+                <a:spcPts val="800"/>
+              </a:spcAft>
+              <a:buNone/>
+            </a:pPr>
+            <a:r>
+              <a:rPr lang="en-US" sz="3600" dirty="0">
+                <a:solidFill>
+                  <a:srgbClr val="111111"/>
+                </a:solidFill>
+                <a:latin typeface="Times New Roman" pitchFamily="34" charset="0"/>
+                <a:ea typeface="Times New Roman" pitchFamily="34" charset="-122"/>
+                <a:cs typeface="Times New Roman" pitchFamily="34" charset="-120"/>
+              </a:rPr>
+              <a:t>The soils are red ferrallitic soils, deep but washed by heavy rain.</a:t>
+            </a:r>
+            <a:endParaRPr lang="en-US" sz="3600" dirty="0"/>
+          </a:p>
+        </p:txBody>
+      </p:sp>
       <p:pic>
         <p:nvPicPr>
-          <p:cNvPr id="3" name="Image 0" descr="/home/claude/f4/img/minesec_sheet.png">    </p:cNvPr>
+          <p:cNvPr id="5" name="Image 0" descr="/home/claude/f4/img/v2/f4_redsoil.jpg">    </p:cNvPr>
           <p:cNvPicPr>
             <a:picLocks noChangeAspect="1"/>
           </p:cNvPicPr>
@@ -14728,8 +15071,8 @@
         </p:blipFill>
         <p:spPr>
           <a:xfrm>
-            <a:off x="0" y="658368"/>
-            <a:ext cx="2468880" cy="5833872"/>
+            <a:off x="5349240" y="2071212"/>
+            <a:ext cx="6659575" cy="3693983"/>
           </a:xfrm>
           <a:prstGeom prst="rect">
             <a:avLst/>
@@ -14738,14 +15081,14 @@
       </p:pic>
       <p:sp>
         <p:nvSpPr>
-          <p:cNvPr id="4" name="Text 1"/>
+          <p:cNvPr id="6" name="Text 3"/>
           <p:cNvSpPr/>
           <p:nvPr/>
         </p:nvSpPr>
         <p:spPr>
           <a:xfrm>
-            <a:off x="2697480" y="1005840"/>
-            <a:ext cx="9174175" cy="731520"/>
+            <a:off x="5349240" y="6089904"/>
+            <a:ext cx="6659575" cy="347472"/>
           </a:xfrm>
           <a:prstGeom prst="rect">
             <a:avLst/>
@@ -14754,142 +15097,24 @@
           <a:ln/>
         </p:spPr>
         <p:txBody>
-          <a:bodyPr wrap="square" lIns="0" tIns="0" rIns="0" bIns="0" rtlCol="0" anchor="ctr">
-            <a:normAutofit/>
-          </a:bodyPr>
+          <a:bodyPr wrap="square" lIns="0" tIns="0" rIns="0" bIns="0" rtlCol="0" anchor="ctr"/>
           <a:lstStyle/>
           <a:p>
             <a:pPr algn="ctr" indent="0" marL="0">
               <a:buNone/>
             </a:pPr>
             <a:r>
-              <a:rPr lang="en-US" sz="3600" b="1" dirty="0">
-                <a:solidFill>
-                  <a:srgbClr val="990011"/>
+              <a:rPr lang="en-US" sz="1600" i="1" dirty="0">
+                <a:solidFill>
+                  <a:srgbClr val="555555"/>
                 </a:solidFill>
                 <a:latin typeface="Times New Roman" pitchFamily="34" charset="0"/>
                 <a:ea typeface="Times New Roman" pitchFamily="34" charset="-122"/>
                 <a:cs typeface="Times New Roman" pitchFamily="34" charset="-120"/>
               </a:rPr>
-              <a:t>2. The Tropical Region</a:t>
-            </a:r>
-            <a:endParaRPr lang="en-US" sz="3600" dirty="0"/>
-          </a:p>
-        </p:txBody>
-      </p:sp>
-      <p:sp>
-        <p:nvSpPr>
-          <p:cNvPr id="5" name="Text 2"/>
-          <p:cNvSpPr/>
-          <p:nvPr/>
-        </p:nvSpPr>
-        <p:spPr>
-          <a:xfrm>
-            <a:off x="2697480" y="1783080"/>
-            <a:ext cx="9174175" cy="4663440"/>
-          </a:xfrm>
-          <a:prstGeom prst="rect">
-            <a:avLst/>
-          </a:prstGeom>
-          <a:noFill/>
-          <a:ln/>
-        </p:spPr>
-        <p:txBody>
-          <a:bodyPr wrap="square" lIns="0" tIns="0" rIns="0" bIns="0" rtlCol="0" anchor="t"/>
-          <a:lstStyle/>
-          <a:p>
-            <a:pPr algn="l" indent="0" marL="0">
-              <a:spcAft>
-                <a:spcPts val="800"/>
-              </a:spcAft>
-              <a:buNone/>
-            </a:pPr>
-            <a:r>
-              <a:rPr lang="en-US" sz="4000" i="1" dirty="0">
-                <a:solidFill>
-                  <a:srgbClr val="111111"/>
-                </a:solidFill>
-                <a:latin typeface="Times New Roman" pitchFamily="34" charset="0"/>
-                <a:ea typeface="Times New Roman" pitchFamily="34" charset="-122"/>
-                <a:cs typeface="Times New Roman" pitchFamily="34" charset="-120"/>
-              </a:rPr>
-              <a:t>The tropical region of northern Cameroon has the following characteristics:</a:t>
-            </a:r>
-            <a:endParaRPr lang="en-US" sz="4000" dirty="0"/>
-          </a:p>
-          <a:p>
-            <a:pPr algn="l" indent="0" marL="0">
-              <a:spcAft>
-                <a:spcPts val="800"/>
-              </a:spcAft>
-              <a:buNone/>
-            </a:pPr>
-            <a:r>
-              <a:rPr lang="en-US" sz="4000" b="1" dirty="0">
-                <a:solidFill>
-                  <a:srgbClr val="111111"/>
-                </a:solidFill>
-                <a:latin typeface="Times New Roman" pitchFamily="34" charset="0"/>
-                <a:ea typeface="Times New Roman" pitchFamily="34" charset="-122"/>
-                <a:cs typeface="Times New Roman" pitchFamily="34" charset="-120"/>
-              </a:rPr>
-              <a:t>Location: </a:t>
-            </a:r>
-            <a:pPr algn="l" indent="0" marL="0">
-              <a:spcAft>
-                <a:spcPts val="800"/>
-              </a:spcAft>
-              <a:buNone/>
-            </a:pPr>
-            <a:r>
-              <a:rPr lang="en-US" sz="4000" dirty="0">
-                <a:solidFill>
-                  <a:srgbClr val="111111"/>
-                </a:solidFill>
-                <a:latin typeface="Times New Roman" pitchFamily="34" charset="0"/>
-                <a:ea typeface="Times New Roman" pitchFamily="34" charset="-122"/>
-                <a:cs typeface="Times New Roman" pitchFamily="34" charset="-120"/>
-              </a:rPr>
-              <a:t>It covers Adamawa, the North and the Far North Regions.</a:t>
-            </a:r>
-            <a:endParaRPr lang="en-US" sz="4000" dirty="0"/>
-          </a:p>
-          <a:p>
-            <a:pPr algn="l" indent="0" marL="0">
-              <a:spcAft>
-                <a:spcPts val="800"/>
-              </a:spcAft>
-              <a:buNone/>
-            </a:pPr>
-            <a:r>
-              <a:rPr lang="en-US" sz="4000" b="1" dirty="0">
-                <a:solidFill>
-                  <a:srgbClr val="111111"/>
-                </a:solidFill>
-                <a:latin typeface="Times New Roman" pitchFamily="34" charset="0"/>
-                <a:ea typeface="Times New Roman" pitchFamily="34" charset="-122"/>
-                <a:cs typeface="Times New Roman" pitchFamily="34" charset="-120"/>
-              </a:rPr>
-              <a:t>Climate: </a:t>
-            </a:r>
-            <a:pPr algn="l" indent="0" marL="0">
-              <a:spcAft>
-                <a:spcPts val="800"/>
-              </a:spcAft>
-              <a:buNone/>
-            </a:pPr>
-            <a:r>
-              <a:rPr lang="en-US" sz="4000" dirty="0">
-                <a:solidFill>
-                  <a:srgbClr val="111111"/>
-                </a:solidFill>
-                <a:latin typeface="Times New Roman" pitchFamily="34" charset="0"/>
-                <a:ea typeface="Times New Roman" pitchFamily="34" charset="-122"/>
-                <a:cs typeface="Times New Roman" pitchFamily="34" charset="-120"/>
-              </a:rPr>
-              <a:t>It has a rainy season and a long dry season, and the rain decreases towards the north.</a:t>
-            </a:r>
-            <a:endParaRPr lang="en-US" sz="4000" dirty="0"/>
+              <a:t>Illustration: red ferrallitic soil</a:t>
+            </a:r>
+            <a:endParaRPr lang="en-US" sz="1600" dirty="0"/>
           </a:p>
         </p:txBody>
       </p:sp>
@@ -15244,9 +15469,129 @@
           </a:p>
         </p:txBody>
       </p:sp>
+      <p:sp>
+        <p:nvSpPr>
+          <p:cNvPr id="3" name="Text 1"/>
+          <p:cNvSpPr/>
+          <p:nvPr/>
+        </p:nvSpPr>
+        <p:spPr>
+          <a:xfrm>
+            <a:off x="365760" y="1005840"/>
+            <a:ext cx="11460175" cy="731520"/>
+          </a:xfrm>
+          <a:prstGeom prst="rect">
+            <a:avLst/>
+          </a:prstGeom>
+          <a:noFill/>
+          <a:ln/>
+        </p:spPr>
+        <p:txBody>
+          <a:bodyPr wrap="square" lIns="0" tIns="0" rIns="0" bIns="0" rtlCol="0" anchor="ctr">
+            <a:normAutofit/>
+          </a:bodyPr>
+          <a:lstStyle/>
+          <a:p>
+            <a:pPr algn="ctr" indent="0" marL="0">
+              <a:buNone/>
+            </a:pPr>
+            <a:r>
+              <a:rPr lang="en-US" sz="3600" b="1" dirty="0">
+                <a:solidFill>
+                  <a:srgbClr val="990011"/>
+                </a:solidFill>
+                <a:latin typeface="Times New Roman" pitchFamily="34" charset="0"/>
+                <a:ea typeface="Times New Roman" pitchFamily="34" charset="-122"/>
+                <a:cs typeface="Times New Roman" pitchFamily="34" charset="-120"/>
+              </a:rPr>
+              <a:t>2. The Tropical Region</a:t>
+            </a:r>
+            <a:endParaRPr lang="en-US" sz="3600" dirty="0"/>
+          </a:p>
+        </p:txBody>
+      </p:sp>
+      <p:sp>
+        <p:nvSpPr>
+          <p:cNvPr id="4" name="Text 2"/>
+          <p:cNvSpPr/>
+          <p:nvPr/>
+        </p:nvSpPr>
+        <p:spPr>
+          <a:xfrm>
+            <a:off x="365760" y="1783080"/>
+            <a:ext cx="4846320" cy="4617720"/>
+          </a:xfrm>
+          <a:prstGeom prst="rect">
+            <a:avLst/>
+          </a:prstGeom>
+          <a:noFill/>
+          <a:ln/>
+        </p:spPr>
+        <p:txBody>
+          <a:bodyPr wrap="square" lIns="0" tIns="0" rIns="0" bIns="0" rtlCol="0" anchor="t"/>
+          <a:lstStyle/>
+          <a:p>
+            <a:pPr algn="l" indent="0" marL="0">
+              <a:spcAft>
+                <a:spcPts val="800"/>
+              </a:spcAft>
+              <a:buNone/>
+            </a:pPr>
+            <a:r>
+              <a:rPr lang="en-US" sz="3600" i="1" dirty="0">
+                <a:solidFill>
+                  <a:srgbClr val="111111"/>
+                </a:solidFill>
+                <a:latin typeface="Times New Roman" pitchFamily="34" charset="0"/>
+                <a:ea typeface="Times New Roman" pitchFamily="34" charset="-122"/>
+                <a:cs typeface="Times New Roman" pitchFamily="34" charset="-120"/>
+              </a:rPr>
+              <a:t>The tropical region of northern Cameroon has the following characteristics:</a:t>
+            </a:r>
+            <a:endParaRPr lang="en-US" sz="3600" dirty="0"/>
+          </a:p>
+          <a:p>
+            <a:pPr algn="l" indent="0" marL="0">
+              <a:spcAft>
+                <a:spcPts val="800"/>
+              </a:spcAft>
+              <a:buNone/>
+            </a:pPr>
+            <a:r>
+              <a:rPr lang="en-US" sz="3600" b="1" dirty="0">
+                <a:solidFill>
+                  <a:srgbClr val="111111"/>
+                </a:solidFill>
+                <a:latin typeface="Times New Roman" pitchFamily="34" charset="0"/>
+                <a:ea typeface="Times New Roman" pitchFamily="34" charset="-122"/>
+                <a:cs typeface="Times New Roman" pitchFamily="34" charset="-120"/>
+              </a:rPr>
+              <a:t>Location: </a:t>
+            </a:r>
+            <a:pPr algn="l" indent="0" marL="0">
+              <a:spcAft>
+                <a:spcPts val="800"/>
+              </a:spcAft>
+              <a:buNone/>
+            </a:pPr>
+            <a:r>
+              <a:rPr lang="en-US" sz="3600" dirty="0">
+                <a:solidFill>
+                  <a:srgbClr val="111111"/>
+                </a:solidFill>
+                <a:latin typeface="Times New Roman" pitchFamily="34" charset="0"/>
+                <a:ea typeface="Times New Roman" pitchFamily="34" charset="-122"/>
+                <a:cs typeface="Times New Roman" pitchFamily="34" charset="-120"/>
+              </a:rPr>
+              <a:t>It covers the Adamawa, North and Far North Regions, north of about 6° N.</a:t>
+            </a:r>
+            <a:endParaRPr lang="en-US" sz="3600" dirty="0"/>
+          </a:p>
+        </p:txBody>
+      </p:sp>
       <p:pic>
         <p:nvPicPr>
-          <p:cNvPr id="3" name="Image 0" descr="/home/claude/f4/img/minesec_sheet.png">    </p:cNvPr>
+          <p:cNvPr id="5" name="Image 0" descr="/home/claude/f4/img/v2/cameroon_climate_big.png">    </p:cNvPr>
           <p:cNvPicPr>
             <a:picLocks noChangeAspect="1"/>
           </p:cNvPicPr>
@@ -15260,8 +15605,8 @@
         </p:blipFill>
         <p:spPr>
           <a:xfrm>
-            <a:off x="0" y="658368"/>
-            <a:ext cx="5120640" cy="5833872"/>
+            <a:off x="5349240" y="2253310"/>
+            <a:ext cx="6659575" cy="3329788"/>
           </a:xfrm>
           <a:prstGeom prst="rect">
             <a:avLst/>
@@ -15270,14 +15615,14 @@
       </p:pic>
       <p:sp>
         <p:nvSpPr>
-          <p:cNvPr id="4" name="Text 1"/>
+          <p:cNvPr id="6" name="Text 3"/>
           <p:cNvSpPr/>
           <p:nvPr/>
         </p:nvSpPr>
         <p:spPr>
           <a:xfrm>
-            <a:off x="5349240" y="1005840"/>
-            <a:ext cx="6522415" cy="731520"/>
+            <a:off x="5349240" y="6089904"/>
+            <a:ext cx="6659575" cy="347472"/>
           </a:xfrm>
           <a:prstGeom prst="rect">
             <a:avLst/>
@@ -15286,122 +15631,24 @@
           <a:ln/>
         </p:spPr>
         <p:txBody>
-          <a:bodyPr wrap="square" lIns="0" tIns="0" rIns="0" bIns="0" rtlCol="0" anchor="ctr">
-            <a:normAutofit/>
-          </a:bodyPr>
+          <a:bodyPr wrap="square" lIns="0" tIns="0" rIns="0" bIns="0" rtlCol="0" anchor="ctr"/>
           <a:lstStyle/>
           <a:p>
             <a:pPr algn="ctr" indent="0" marL="0">
               <a:buNone/>
             </a:pPr>
             <a:r>
-              <a:rPr lang="en-US" sz="3600" b="1" dirty="0">
-                <a:solidFill>
-                  <a:srgbClr val="990011"/>
+              <a:rPr lang="en-US" sz="1600" i="1" dirty="0">
+                <a:solidFill>
+                  <a:srgbClr val="555555"/>
                 </a:solidFill>
                 <a:latin typeface="Times New Roman" pitchFamily="34" charset="0"/>
                 <a:ea typeface="Times New Roman" pitchFamily="34" charset="-122"/>
                 <a:cs typeface="Times New Roman" pitchFamily="34" charset="-120"/>
               </a:rPr>
-              <a:t>2. The Tropical Region (continued)</a:t>
-            </a:r>
-            <a:endParaRPr lang="en-US" sz="3600" dirty="0"/>
-          </a:p>
-        </p:txBody>
-      </p:sp>
-      <p:sp>
-        <p:nvSpPr>
-          <p:cNvPr id="5" name="Text 2"/>
-          <p:cNvSpPr/>
-          <p:nvPr/>
-        </p:nvSpPr>
-        <p:spPr>
-          <a:xfrm>
-            <a:off x="5349240" y="1783080"/>
-            <a:ext cx="6522415" cy="4663440"/>
-          </a:xfrm>
-          <a:prstGeom prst="rect">
-            <a:avLst/>
-          </a:prstGeom>
-          <a:noFill/>
-          <a:ln/>
-        </p:spPr>
-        <p:txBody>
-          <a:bodyPr wrap="square" lIns="0" tIns="0" rIns="0" bIns="0" rtlCol="0" anchor="t"/>
-          <a:lstStyle/>
-          <a:p>
-            <a:pPr algn="l" indent="0" marL="0">
-              <a:spcAft>
-                <a:spcPts val="800"/>
-              </a:spcAft>
-              <a:buNone/>
-            </a:pPr>
-            <a:r>
-              <a:rPr lang="en-US" sz="4000" b="1" dirty="0">
-                <a:solidFill>
-                  <a:srgbClr val="111111"/>
-                </a:solidFill>
-                <a:latin typeface="Times New Roman" pitchFamily="34" charset="0"/>
-                <a:ea typeface="Times New Roman" pitchFamily="34" charset="-122"/>
-                <a:cs typeface="Times New Roman" pitchFamily="34" charset="-120"/>
-              </a:rPr>
-              <a:t>Vegetation: </a:t>
-            </a:r>
-            <a:pPr algn="l" indent="0" marL="0">
-              <a:spcAft>
-                <a:spcPts val="800"/>
-              </a:spcAft>
-              <a:buNone/>
-            </a:pPr>
-            <a:r>
-              <a:rPr lang="en-US" sz="4000" dirty="0">
-                <a:solidFill>
-                  <a:srgbClr val="111111"/>
-                </a:solidFill>
-                <a:latin typeface="Times New Roman" pitchFamily="34" charset="0"/>
-                <a:ea typeface="Times New Roman" pitchFamily="34" charset="-122"/>
-                <a:cs typeface="Times New Roman" pitchFamily="34" charset="-120"/>
-              </a:rPr>
-              <a:t>It is covered by savanna, which becomes Sahel steppe in the Far North.</a:t>
-            </a:r>
-            <a:endParaRPr lang="en-US" sz="4000" dirty="0"/>
-          </a:p>
-          <a:p>
-            <a:pPr algn="l" indent="0" marL="0">
-              <a:spcAft>
-                <a:spcPts val="800"/>
-              </a:spcAft>
-              <a:buNone/>
-            </a:pPr>
-            <a:r>
-              <a:rPr lang="en-US" sz="4000" b="1" dirty="0">
-                <a:solidFill>
-                  <a:srgbClr val="111111"/>
-                </a:solidFill>
-                <a:latin typeface="Times New Roman" pitchFamily="34" charset="0"/>
-                <a:ea typeface="Times New Roman" pitchFamily="34" charset="-122"/>
-                <a:cs typeface="Times New Roman" pitchFamily="34" charset="-120"/>
-              </a:rPr>
-              <a:t>Soil: </a:t>
-            </a:r>
-            <a:pPr algn="l" indent="0" marL="0">
-              <a:spcAft>
-                <a:spcPts val="800"/>
-              </a:spcAft>
-              <a:buNone/>
-            </a:pPr>
-            <a:r>
-              <a:rPr lang="en-US" sz="4000" dirty="0">
-                <a:solidFill>
-                  <a:srgbClr val="111111"/>
-                </a:solidFill>
-                <a:latin typeface="Times New Roman" pitchFamily="34" charset="0"/>
-                <a:ea typeface="Times New Roman" pitchFamily="34" charset="-122"/>
-                <a:cs typeface="Times New Roman" pitchFamily="34" charset="-120"/>
-              </a:rPr>
-              <a:t>The soils are ferruginous soils, with black clay soils in some valleys.</a:t>
-            </a:r>
-            <a:endParaRPr lang="en-US" sz="4000" dirty="0"/>
+              <a:t>Illustration: the climates of Cameroon</a:t>
+            </a:r>
+            <a:endParaRPr lang="en-US" sz="1600" dirty="0"/>
           </a:p>
         </p:txBody>
       </p:sp>
@@ -15525,8 +15772,8 @@
         </p:nvSpPr>
         <p:spPr>
           <a:xfrm>
-            <a:off x="457200" y="1005840"/>
-            <a:ext cx="11277295" cy="731520"/>
+            <a:off x="365760" y="1005840"/>
+            <a:ext cx="11460175" cy="731520"/>
           </a:xfrm>
           <a:prstGeom prst="rect">
             <a:avLst/>
@@ -15535,7 +15782,9 @@
           <a:ln/>
         </p:spPr>
         <p:txBody>
-          <a:bodyPr wrap="square" lIns="0" tIns="0" rIns="0" bIns="0" rtlCol="0" anchor="ctr"/>
+          <a:bodyPr wrap="square" lIns="0" tIns="0" rIns="0" bIns="0" rtlCol="0" anchor="ctr">
+            <a:normAutofit/>
+          </a:bodyPr>
           <a:lstStyle/>
           <a:p>
             <a:pPr algn="ctr" indent="0" marL="0">
@@ -15556,9 +15805,68 @@
           </a:p>
         </p:txBody>
       </p:sp>
+      <p:sp>
+        <p:nvSpPr>
+          <p:cNvPr id="4" name="Text 2"/>
+          <p:cNvSpPr/>
+          <p:nvPr/>
+        </p:nvSpPr>
+        <p:spPr>
+          <a:xfrm>
+            <a:off x="365760" y="1783080"/>
+            <a:ext cx="4846320" cy="4617720"/>
+          </a:xfrm>
+          <a:prstGeom prst="rect">
+            <a:avLst/>
+          </a:prstGeom>
+          <a:noFill/>
+          <a:ln/>
+        </p:spPr>
+        <p:txBody>
+          <a:bodyPr wrap="square" lIns="0" tIns="0" rIns="0" bIns="0" rtlCol="0" anchor="t"/>
+          <a:lstStyle/>
+          <a:p>
+            <a:pPr algn="l" indent="0" marL="0">
+              <a:spcAft>
+                <a:spcPts val="800"/>
+              </a:spcAft>
+              <a:buNone/>
+            </a:pPr>
+            <a:r>
+              <a:rPr lang="en-US" sz="3600" b="1" dirty="0">
+                <a:solidFill>
+                  <a:srgbClr val="111111"/>
+                </a:solidFill>
+                <a:latin typeface="Times New Roman" pitchFamily="34" charset="0"/>
+                <a:ea typeface="Times New Roman" pitchFamily="34" charset="-122"/>
+                <a:cs typeface="Times New Roman" pitchFamily="34" charset="-120"/>
+              </a:rPr>
+              <a:t>Climate: </a:t>
+            </a:r>
+            <a:pPr algn="l" indent="0" marL="0">
+              <a:spcAft>
+                <a:spcPts val="800"/>
+              </a:spcAft>
+              <a:buNone/>
+            </a:pPr>
+            <a:r>
+              <a:rPr lang="en-US" sz="3600" dirty="0">
+                <a:solidFill>
+                  <a:srgbClr val="111111"/>
+                </a:solidFill>
+                <a:latin typeface="Times New Roman" pitchFamily="34" charset="0"/>
+                <a:ea typeface="Times New Roman" pitchFamily="34" charset="-122"/>
+                <a:cs typeface="Times New Roman" pitchFamily="34" charset="-120"/>
+              </a:rPr>
+              <a:t>It has a rainy season and a long dry season. Rainfall decreases towards the north.</a:t>
+            </a:r>
+            <a:endParaRPr lang="en-US" sz="3600" dirty="0"/>
+          </a:p>
+        </p:txBody>
+      </p:sp>
       <p:pic>
         <p:nvPicPr>
-          <p:cNvPr id="4" name="Image 0" descr="/home/claude/f4/img/v2/garoua_climate_big.png">    </p:cNvPr>
+          <p:cNvPr id="5" name="Image 0" descr="/home/claude/f4/img/v2/garoua_climate_big.png">    </p:cNvPr>
           <p:cNvPicPr>
             <a:picLocks noChangeAspect="1"/>
           </p:cNvPicPr>
@@ -15572,8 +15880,8 @@
         </p:blipFill>
         <p:spPr>
           <a:xfrm>
-            <a:off x="1215564" y="1783080"/>
-            <a:ext cx="9760567" cy="4270248"/>
+            <a:off x="5349240" y="2461422"/>
+            <a:ext cx="6659575" cy="2913564"/>
           </a:xfrm>
           <a:prstGeom prst="rect">
             <a:avLst/>
@@ -15582,14 +15890,14 @@
       </p:pic>
       <p:sp>
         <p:nvSpPr>
-          <p:cNvPr id="5" name="Text 2"/>
+          <p:cNvPr id="6" name="Text 3"/>
           <p:cNvSpPr/>
           <p:nvPr/>
         </p:nvSpPr>
         <p:spPr>
           <a:xfrm>
-            <a:off x="457200" y="6089904"/>
-            <a:ext cx="11277295" cy="347472"/>
+            <a:off x="5349240" y="6089904"/>
+            <a:ext cx="6659575" cy="347472"/>
           </a:xfrm>
           <a:prstGeom prst="rect">
             <a:avLst/>
@@ -15605,7 +15913,7 @@
               <a:buNone/>
             </a:pPr>
             <a:r>
-              <a:rPr lang="en-US" sz="1800" i="1" dirty="0">
+              <a:rPr lang="en-US" sz="1600" i="1" dirty="0">
                 <a:solidFill>
                   <a:srgbClr val="555555"/>
                 </a:solidFill>
@@ -15615,7 +15923,7 @@
               </a:rPr>
               <a:t>Illustration: the climate of Garoua</a:t>
             </a:r>
-            <a:endParaRPr lang="en-US" sz="1800" dirty="0"/>
+            <a:endParaRPr lang="en-US" sz="1600" dirty="0"/>
           </a:p>
         </p:txBody>
       </p:sp>
@@ -15725,15 +16033,115 @@
                 <a:ea typeface="Calibri" pitchFamily="34" charset="-122"/>
                 <a:cs typeface="Calibri" pitchFamily="34" charset="-120"/>
               </a:rPr>
-              <a:t>FORMATIVE EVALUATION</a:t>
+              <a:t>BOARD SUMMARY</a:t>
             </a:r>
             <a:endParaRPr lang="en-US" sz="1400" dirty="0"/>
+          </a:p>
+        </p:txBody>
+      </p:sp>
+      <p:sp>
+        <p:nvSpPr>
+          <p:cNvPr id="3" name="Text 1"/>
+          <p:cNvSpPr/>
+          <p:nvPr/>
+        </p:nvSpPr>
+        <p:spPr>
+          <a:xfrm>
+            <a:off x="365760" y="1005840"/>
+            <a:ext cx="11460175" cy="731520"/>
+          </a:xfrm>
+          <a:prstGeom prst="rect">
+            <a:avLst/>
+          </a:prstGeom>
+          <a:noFill/>
+          <a:ln/>
+        </p:spPr>
+        <p:txBody>
+          <a:bodyPr wrap="square" lIns="0" tIns="0" rIns="0" bIns="0" rtlCol="0" anchor="ctr">
+            <a:normAutofit/>
+          </a:bodyPr>
+          <a:lstStyle/>
+          <a:p>
+            <a:pPr algn="ctr" indent="0" marL="0">
+              <a:buNone/>
+            </a:pPr>
+            <a:r>
+              <a:rPr lang="en-US" sz="3600" b="1" dirty="0">
+                <a:solidFill>
+                  <a:srgbClr val="990011"/>
+                </a:solidFill>
+                <a:latin typeface="Times New Roman" pitchFamily="34" charset="0"/>
+                <a:ea typeface="Times New Roman" pitchFamily="34" charset="-122"/>
+                <a:cs typeface="Times New Roman" pitchFamily="34" charset="-120"/>
+              </a:rPr>
+              <a:t>2. The Tropical Region</a:t>
+            </a:r>
+            <a:endParaRPr lang="en-US" sz="3600" dirty="0"/>
+          </a:p>
+        </p:txBody>
+      </p:sp>
+      <p:sp>
+        <p:nvSpPr>
+          <p:cNvPr id="4" name="Text 2"/>
+          <p:cNvSpPr/>
+          <p:nvPr/>
+        </p:nvSpPr>
+        <p:spPr>
+          <a:xfrm>
+            <a:off x="365760" y="1783080"/>
+            <a:ext cx="4846320" cy="4617720"/>
+          </a:xfrm>
+          <a:prstGeom prst="rect">
+            <a:avLst/>
+          </a:prstGeom>
+          <a:noFill/>
+          <a:ln/>
+        </p:spPr>
+        <p:txBody>
+          <a:bodyPr wrap="square" lIns="0" tIns="0" rIns="0" bIns="0" rtlCol="0" anchor="t"/>
+          <a:lstStyle/>
+          <a:p>
+            <a:pPr algn="l" indent="0" marL="0">
+              <a:spcAft>
+                <a:spcPts val="800"/>
+              </a:spcAft>
+              <a:buNone/>
+            </a:pPr>
+            <a:r>
+              <a:rPr lang="en-US" sz="3600" b="1" dirty="0">
+                <a:solidFill>
+                  <a:srgbClr val="111111"/>
+                </a:solidFill>
+                <a:latin typeface="Times New Roman" pitchFamily="34" charset="0"/>
+                <a:ea typeface="Times New Roman" pitchFamily="34" charset="-122"/>
+                <a:cs typeface="Times New Roman" pitchFamily="34" charset="-120"/>
+              </a:rPr>
+              <a:t>Vegetation: </a:t>
+            </a:r>
+            <a:pPr algn="l" indent="0" marL="0">
+              <a:spcAft>
+                <a:spcPts val="800"/>
+              </a:spcAft>
+              <a:buNone/>
+            </a:pPr>
+            <a:r>
+              <a:rPr lang="en-US" sz="3600" dirty="0">
+                <a:solidFill>
+                  <a:srgbClr val="111111"/>
+                </a:solidFill>
+                <a:latin typeface="Times New Roman" pitchFamily="34" charset="0"/>
+                <a:ea typeface="Times New Roman" pitchFamily="34" charset="-122"/>
+                <a:cs typeface="Times New Roman" pitchFamily="34" charset="-120"/>
+              </a:rPr>
+              <a:t>It is covered by savanna of grass with scattered trees, which becomes Sahel steppe in the Far North.</a:t>
+            </a:r>
+            <a:endParaRPr lang="en-US" sz="3600" dirty="0"/>
           </a:p>
         </p:txBody>
       </p:sp>
       <p:pic>
         <p:nvPicPr>
-          <p:cNvPr id="3" name="Image 0" descr="/home/claude/f4/img/minesec_sheet.png">    </p:cNvPr>
+          <p:cNvPr id="5" name="Image 0" descr="/home/claude/f4/img/v2/f2t_savanna.jpg">    </p:cNvPr>
           <p:cNvPicPr>
             <a:picLocks noChangeAspect="1"/>
           </p:cNvPicPr>
@@ -15747,8 +16155,8 @@
         </p:blipFill>
         <p:spPr>
           <a:xfrm>
-            <a:off x="0" y="658368"/>
-            <a:ext cx="5120640" cy="5833872"/>
+            <a:off x="5349240" y="2695548"/>
+            <a:ext cx="6659575" cy="2445313"/>
           </a:xfrm>
           <a:prstGeom prst="rect">
             <a:avLst/>
@@ -15757,14 +16165,14 @@
       </p:pic>
       <p:sp>
         <p:nvSpPr>
-          <p:cNvPr id="4" name="Text 1"/>
+          <p:cNvPr id="6" name="Text 3"/>
           <p:cNvSpPr/>
           <p:nvPr/>
         </p:nvSpPr>
         <p:spPr>
           <a:xfrm>
-            <a:off x="5349240" y="1005840"/>
-            <a:ext cx="6522415" cy="731520"/>
+            <a:off x="5349240" y="6089904"/>
+            <a:ext cx="6659575" cy="347472"/>
           </a:xfrm>
           <a:prstGeom prst="rect">
             <a:avLst/>
@@ -15773,68 +16181,24 @@
           <a:ln/>
         </p:spPr>
         <p:txBody>
-          <a:bodyPr wrap="square" lIns="0" tIns="0" rIns="0" bIns="0" rtlCol="0" anchor="ctr">
-            <a:normAutofit/>
-          </a:bodyPr>
+          <a:bodyPr wrap="square" lIns="0" tIns="0" rIns="0" bIns="0" rtlCol="0" anchor="ctr"/>
           <a:lstStyle/>
           <a:p>
             <a:pPr algn="ctr" indent="0" marL="0">
               <a:buNone/>
             </a:pPr>
             <a:r>
-              <a:rPr lang="en-US" sz="3600" b="1" dirty="0">
-                <a:solidFill>
-                  <a:srgbClr val="990011"/>
+              <a:rPr lang="en-US" sz="1600" i="1" dirty="0">
+                <a:solidFill>
+                  <a:srgbClr val="555555"/>
                 </a:solidFill>
                 <a:latin typeface="Times New Roman" pitchFamily="34" charset="0"/>
                 <a:ea typeface="Times New Roman" pitchFamily="34" charset="-122"/>
                 <a:cs typeface="Times New Roman" pitchFamily="34" charset="-120"/>
               </a:rPr>
-              <a:t>Evaluation 1</a:t>
-            </a:r>
-            <a:endParaRPr lang="en-US" sz="3600" dirty="0"/>
-          </a:p>
-        </p:txBody>
-      </p:sp>
-      <p:sp>
-        <p:nvSpPr>
-          <p:cNvPr id="5" name="Text 2"/>
-          <p:cNvSpPr/>
-          <p:nvPr/>
-        </p:nvSpPr>
-        <p:spPr>
-          <a:xfrm>
-            <a:off x="5349240" y="1783080"/>
-            <a:ext cx="6522415" cy="4663440"/>
-          </a:xfrm>
-          <a:prstGeom prst="rect">
-            <a:avLst/>
-          </a:prstGeom>
-          <a:noFill/>
-          <a:ln/>
-        </p:spPr>
-        <p:txBody>
-          <a:bodyPr wrap="square" lIns="0" tIns="0" rIns="0" bIns="0" rtlCol="0" anchor="t"/>
-          <a:lstStyle/>
-          <a:p>
-            <a:pPr algn="l" indent="0" marL="0">
-              <a:spcAft>
-                <a:spcPts val="800"/>
-              </a:spcAft>
-              <a:buNone/>
-            </a:pPr>
-            <a:r>
-              <a:rPr lang="en-US" sz="4000" dirty="0">
-                <a:solidFill>
-                  <a:srgbClr val="111111"/>
-                </a:solidFill>
-                <a:latin typeface="Times New Roman" pitchFamily="34" charset="0"/>
-                <a:ea typeface="Times New Roman" pitchFamily="34" charset="-122"/>
-                <a:cs typeface="Times New Roman" pitchFamily="34" charset="-120"/>
-              </a:rPr>
-              <a:t>Name the two main natural regions of Cameroon.</a:t>
-            </a:r>
-            <a:endParaRPr lang="en-US" sz="4000" dirty="0"/>
+              <a:t>Illustration: the savanna</a:t>
+            </a:r>
+            <a:endParaRPr lang="en-US" sz="1600" dirty="0"/>
           </a:p>
         </p:txBody>
       </p:sp>
@@ -15944,15 +16308,115 @@
                 <a:ea typeface="Calibri" pitchFamily="34" charset="-122"/>
                 <a:cs typeface="Calibri" pitchFamily="34" charset="-120"/>
               </a:rPr>
-              <a:t>FORMATIVE EVALUATION</a:t>
+              <a:t>BOARD SUMMARY</a:t>
             </a:r>
             <a:endParaRPr lang="en-US" sz="1400" dirty="0"/>
+          </a:p>
+        </p:txBody>
+      </p:sp>
+      <p:sp>
+        <p:nvSpPr>
+          <p:cNvPr id="3" name="Text 1"/>
+          <p:cNvSpPr/>
+          <p:nvPr/>
+        </p:nvSpPr>
+        <p:spPr>
+          <a:xfrm>
+            <a:off x="365760" y="1005840"/>
+            <a:ext cx="11460175" cy="731520"/>
+          </a:xfrm>
+          <a:prstGeom prst="rect">
+            <a:avLst/>
+          </a:prstGeom>
+          <a:noFill/>
+          <a:ln/>
+        </p:spPr>
+        <p:txBody>
+          <a:bodyPr wrap="square" lIns="0" tIns="0" rIns="0" bIns="0" rtlCol="0" anchor="ctr">
+            <a:normAutofit/>
+          </a:bodyPr>
+          <a:lstStyle/>
+          <a:p>
+            <a:pPr algn="ctr" indent="0" marL="0">
+              <a:buNone/>
+            </a:pPr>
+            <a:r>
+              <a:rPr lang="en-US" sz="3600" b="1" dirty="0">
+                <a:solidFill>
+                  <a:srgbClr val="990011"/>
+                </a:solidFill>
+                <a:latin typeface="Times New Roman" pitchFamily="34" charset="0"/>
+                <a:ea typeface="Times New Roman" pitchFamily="34" charset="-122"/>
+                <a:cs typeface="Times New Roman" pitchFamily="34" charset="-120"/>
+              </a:rPr>
+              <a:t>2. The Tropical Region</a:t>
+            </a:r>
+            <a:endParaRPr lang="en-US" sz="3600" dirty="0"/>
+          </a:p>
+        </p:txBody>
+      </p:sp>
+      <p:sp>
+        <p:nvSpPr>
+          <p:cNvPr id="4" name="Text 2"/>
+          <p:cNvSpPr/>
+          <p:nvPr/>
+        </p:nvSpPr>
+        <p:spPr>
+          <a:xfrm>
+            <a:off x="365760" y="1783080"/>
+            <a:ext cx="4846320" cy="4617720"/>
+          </a:xfrm>
+          <a:prstGeom prst="rect">
+            <a:avLst/>
+          </a:prstGeom>
+          <a:noFill/>
+          <a:ln/>
+        </p:spPr>
+        <p:txBody>
+          <a:bodyPr wrap="square" lIns="0" tIns="0" rIns="0" bIns="0" rtlCol="0" anchor="t"/>
+          <a:lstStyle/>
+          <a:p>
+            <a:pPr algn="l" indent="0" marL="0">
+              <a:spcAft>
+                <a:spcPts val="800"/>
+              </a:spcAft>
+              <a:buNone/>
+            </a:pPr>
+            <a:r>
+              <a:rPr lang="en-US" sz="3600" b="1" dirty="0">
+                <a:solidFill>
+                  <a:srgbClr val="111111"/>
+                </a:solidFill>
+                <a:latin typeface="Times New Roman" pitchFamily="34" charset="0"/>
+                <a:ea typeface="Times New Roman" pitchFamily="34" charset="-122"/>
+                <a:cs typeface="Times New Roman" pitchFamily="34" charset="-120"/>
+              </a:rPr>
+              <a:t>Soil: </a:t>
+            </a:r>
+            <a:pPr algn="l" indent="0" marL="0">
+              <a:spcAft>
+                <a:spcPts val="800"/>
+              </a:spcAft>
+              <a:buNone/>
+            </a:pPr>
+            <a:r>
+              <a:rPr lang="en-US" sz="3600" dirty="0">
+                <a:solidFill>
+                  <a:srgbClr val="111111"/>
+                </a:solidFill>
+                <a:latin typeface="Times New Roman" pitchFamily="34" charset="0"/>
+                <a:ea typeface="Times New Roman" pitchFamily="34" charset="-122"/>
+                <a:cs typeface="Times New Roman" pitchFamily="34" charset="-120"/>
+              </a:rPr>
+              <a:t>The soils are ferruginous soils, often hard and red, with black clay soils in some valleys.</a:t>
+            </a:r>
+            <a:endParaRPr lang="en-US" sz="3600" dirty="0"/>
           </a:p>
         </p:txBody>
       </p:sp>
       <p:pic>
         <p:nvPicPr>
-          <p:cNvPr id="3" name="Image 0" descr="/home/claude/f4/img/minesec_sheet.png">    </p:cNvPr>
+          <p:cNvPr id="5" name="Image 0" descr="/home/claude/f4/img/v2/f2t_laterite.jpg">    </p:cNvPr>
           <p:cNvPicPr>
             <a:picLocks noChangeAspect="1"/>
           </p:cNvPicPr>
@@ -15966,8 +16430,8 @@
         </p:blipFill>
         <p:spPr>
           <a:xfrm>
-            <a:off x="0" y="658368"/>
-            <a:ext cx="5120640" cy="5833872"/>
+            <a:off x="5349240" y="2070172"/>
+            <a:ext cx="6659575" cy="3696064"/>
           </a:xfrm>
           <a:prstGeom prst="rect">
             <a:avLst/>
@@ -15976,14 +16440,14 @@
       </p:pic>
       <p:sp>
         <p:nvSpPr>
-          <p:cNvPr id="4" name="Text 1"/>
+          <p:cNvPr id="6" name="Text 3"/>
           <p:cNvSpPr/>
           <p:nvPr/>
         </p:nvSpPr>
         <p:spPr>
           <a:xfrm>
-            <a:off x="5349240" y="1005840"/>
-            <a:ext cx="6522415" cy="731520"/>
+            <a:off x="5349240" y="6089904"/>
+            <a:ext cx="6659575" cy="347472"/>
           </a:xfrm>
           <a:prstGeom prst="rect">
             <a:avLst/>
@@ -15992,68 +16456,24 @@
           <a:ln/>
         </p:spPr>
         <p:txBody>
-          <a:bodyPr wrap="square" lIns="0" tIns="0" rIns="0" bIns="0" rtlCol="0" anchor="ctr">
-            <a:normAutofit/>
-          </a:bodyPr>
+          <a:bodyPr wrap="square" lIns="0" tIns="0" rIns="0" bIns="0" rtlCol="0" anchor="ctr"/>
           <a:lstStyle/>
           <a:p>
             <a:pPr algn="ctr" indent="0" marL="0">
               <a:buNone/>
             </a:pPr>
             <a:r>
-              <a:rPr lang="en-US" sz="3600" b="1" dirty="0">
-                <a:solidFill>
-                  <a:srgbClr val="990011"/>
+              <a:rPr lang="en-US" sz="1600" i="1" dirty="0">
+                <a:solidFill>
+                  <a:srgbClr val="555555"/>
                 </a:solidFill>
                 <a:latin typeface="Times New Roman" pitchFamily="34" charset="0"/>
                 <a:ea typeface="Times New Roman" pitchFamily="34" charset="-122"/>
                 <a:cs typeface="Times New Roman" pitchFamily="34" charset="-120"/>
               </a:rPr>
-              <a:t>Expected Answer</a:t>
-            </a:r>
-            <a:endParaRPr lang="en-US" sz="3600" dirty="0"/>
-          </a:p>
-        </p:txBody>
-      </p:sp>
-      <p:sp>
-        <p:nvSpPr>
-          <p:cNvPr id="5" name="Text 2"/>
-          <p:cNvSpPr/>
-          <p:nvPr/>
-        </p:nvSpPr>
-        <p:spPr>
-          <a:xfrm>
-            <a:off x="5349240" y="1783080"/>
-            <a:ext cx="6522415" cy="4663440"/>
-          </a:xfrm>
-          <a:prstGeom prst="rect">
-            <a:avLst/>
-          </a:prstGeom>
-          <a:noFill/>
-          <a:ln/>
-        </p:spPr>
-        <p:txBody>
-          <a:bodyPr wrap="square" lIns="0" tIns="0" rIns="0" bIns="0" rtlCol="0" anchor="t"/>
-          <a:lstStyle/>
-          <a:p>
-            <a:pPr algn="l" indent="0" marL="0">
-              <a:spcAft>
-                <a:spcPts val="800"/>
-              </a:spcAft>
-              <a:buNone/>
-            </a:pPr>
-            <a:r>
-              <a:rPr lang="en-US" sz="4000" dirty="0">
-                <a:solidFill>
-                  <a:srgbClr val="111111"/>
-                </a:solidFill>
-                <a:latin typeface="Times New Roman" pitchFamily="34" charset="0"/>
-                <a:ea typeface="Times New Roman" pitchFamily="34" charset="-122"/>
-                <a:cs typeface="Times New Roman" pitchFamily="34" charset="-120"/>
-              </a:rPr>
-              <a:t>The equatorial region and the tropical region.</a:t>
-            </a:r>
-            <a:endParaRPr lang="en-US" sz="4000" dirty="0"/>
+              <a:t>Illustration: ferruginous soil</a:t>
+            </a:r>
+            <a:endParaRPr lang="en-US" sz="1600" dirty="0"/>
           </a:p>
         </p:txBody>
       </p:sp>
@@ -16228,7 +16648,7 @@
                 <a:ea typeface="Times New Roman" pitchFamily="34" charset="-122"/>
                 <a:cs typeface="Times New Roman" pitchFamily="34" charset="-120"/>
               </a:rPr>
-              <a:t>Evaluation 2</a:t>
+              <a:t>Evaluation 1</a:t>
             </a:r>
             <a:endParaRPr lang="en-US" sz="3600" dirty="0"/>
           </a:p>
@@ -16270,7 +16690,7 @@
                 <a:ea typeface="Times New Roman" pitchFamily="34" charset="-122"/>
                 <a:cs typeface="Times New Roman" pitchFamily="34" charset="-120"/>
               </a:rPr>
-              <a:t>Give one characteristic of the climate of each.</a:t>
+              <a:t>Name the two main natural regions of Cameroon.</a:t>
             </a:r>
             <a:endParaRPr lang="en-US" sz="4000" dirty="0"/>
           </a:p>
@@ -16489,7 +16909,7 @@
                 <a:ea typeface="Times New Roman" pitchFamily="34" charset="-122"/>
                 <a:cs typeface="Times New Roman" pitchFamily="34" charset="-120"/>
               </a:rPr>
-              <a:t>Equatorial: rain in almost every month. Tropical: a long dry season.</a:t>
+              <a:t>The equatorial region and the tropical region.</a:t>
             </a:r>
             <a:endParaRPr lang="en-US" sz="4000" dirty="0"/>
           </a:p>
@@ -16601,7 +17021,7 @@
                 <a:ea typeface="Calibri" pitchFamily="34" charset="-122"/>
                 <a:cs typeface="Calibri" pitchFamily="34" charset="-120"/>
               </a:rPr>
-              <a:t>REMEDIATION</a:t>
+              <a:t>FORMATIVE EVALUATION</a:t>
             </a:r>
             <a:endParaRPr lang="en-US" sz="1400" dirty="0"/>
           </a:p>
@@ -16666,7 +17086,7 @@
                 <a:ea typeface="Times New Roman" pitchFamily="34" charset="-122"/>
                 <a:cs typeface="Times New Roman" pitchFamily="34" charset="-120"/>
               </a:rPr>
-              <a:t>Remediation</a:t>
+              <a:t>Evaluation 2</a:t>
             </a:r>
             <a:endParaRPr lang="en-US" sz="3600" dirty="0"/>
           </a:p>
@@ -16700,7 +17120,7 @@
               <a:buNone/>
             </a:pPr>
             <a:r>
-              <a:rPr lang="en-US" sz="4000" b="1" dirty="0">
+              <a:rPr lang="en-US" sz="4000" dirty="0">
                 <a:solidFill>
                   <a:srgbClr val="111111"/>
                 </a:solidFill>
@@ -16708,51 +17128,7 @@
                 <a:ea typeface="Times New Roman" pitchFamily="34" charset="-122"/>
                 <a:cs typeface="Times New Roman" pitchFamily="34" charset="-120"/>
               </a:rPr>
-              <a:t>Fill in the blanks:</a:t>
-            </a:r>
-            <a:endParaRPr lang="en-US" sz="4000" dirty="0"/>
-          </a:p>
-          <a:p>
-            <a:pPr algn="l" marL="342900" indent="-342900">
-              <a:spcAft>
-                <a:spcPts val="800"/>
-              </a:spcAft>
-              <a:buSzPct val="100000"/>
-              <a:buFont typeface="+mj-lt"/>
-              <a:buAutoNum type="arabicPeriod" startAt="1"/>
-            </a:pPr>
-            <a:r>
-              <a:rPr lang="en-US" sz="4000" dirty="0">
-                <a:solidFill>
-                  <a:srgbClr val="111111"/>
-                </a:solidFill>
-                <a:latin typeface="Times New Roman" pitchFamily="34" charset="0"/>
-                <a:ea typeface="Times New Roman" pitchFamily="34" charset="-122"/>
-                <a:cs typeface="Times New Roman" pitchFamily="34" charset="-120"/>
-              </a:rPr>
-              <a:t>The thick forest of the South is the ______.</a:t>
-            </a:r>
-            <a:endParaRPr lang="en-US" sz="4000" dirty="0"/>
-          </a:p>
-          <a:p>
-            <a:pPr algn="l" marL="342900" indent="-342900">
-              <a:spcAft>
-                <a:spcPts val="800"/>
-              </a:spcAft>
-              <a:buSzPct val="100000"/>
-              <a:buFont typeface="+mj-lt"/>
-              <a:buAutoNum type="arabicPeriod" startAt="1"/>
-            </a:pPr>
-            <a:r>
-              <a:rPr lang="en-US" sz="4000" dirty="0">
-                <a:solidFill>
-                  <a:srgbClr val="111111"/>
-                </a:solidFill>
-                <a:latin typeface="Times New Roman" pitchFamily="34" charset="0"/>
-                <a:ea typeface="Times New Roman" pitchFamily="34" charset="-122"/>
-                <a:cs typeface="Times New Roman" pitchFamily="34" charset="-120"/>
-              </a:rPr>
-              <a:t>The vegetation around Garoua is the ______.</a:t>
+              <a:t>Give one characteristic of the climate of each.</a:t>
             </a:r>
             <a:endParaRPr lang="en-US" sz="4000" dirty="0"/>
           </a:p>
@@ -16864,7 +17240,7 @@
                 <a:ea typeface="Calibri" pitchFamily="34" charset="-122"/>
                 <a:cs typeface="Calibri" pitchFamily="34" charset="-120"/>
               </a:rPr>
-              <a:t>REMEDIATION</a:t>
+              <a:t>FORMATIVE EVALUATION</a:t>
             </a:r>
             <a:endParaRPr lang="en-US" sz="1400" dirty="0"/>
           </a:p>
@@ -16929,7 +17305,7 @@
                 <a:ea typeface="Times New Roman" pitchFamily="34" charset="-122"/>
                 <a:cs typeface="Times New Roman" pitchFamily="34" charset="-120"/>
               </a:rPr>
-              <a:t>Remediation (continued)</a:t>
+              <a:t>Expected Answer</a:t>
             </a:r>
             <a:endParaRPr lang="en-US" sz="3600" dirty="0"/>
           </a:p>
@@ -16956,13 +17332,11 @@
           <a:bodyPr wrap="square" lIns="0" tIns="0" rIns="0" bIns="0" rtlCol="0" anchor="t"/>
           <a:lstStyle/>
           <a:p>
-            <a:pPr algn="l" marL="342900" indent="-342900">
+            <a:pPr algn="l" indent="0" marL="0">
               <a:spcAft>
                 <a:spcPts val="800"/>
               </a:spcAft>
-              <a:buSzPct val="100000"/>
-              <a:buFont typeface="+mj-lt"/>
-              <a:buAutoNum type="arabicPeriod" startAt="1"/>
+              <a:buNone/>
             </a:pPr>
             <a:r>
               <a:rPr lang="en-US" sz="4000" dirty="0">
@@ -16973,7 +17347,7 @@
                 <a:ea typeface="Times New Roman" pitchFamily="34" charset="-122"/>
                 <a:cs typeface="Times New Roman" pitchFamily="34" charset="-120"/>
               </a:rPr>
-              <a:t>The soils of the forest region are ______ soils.</a:t>
+              <a:t>Equatorial: rain in almost every month. Tropical: a long dry season.</a:t>
             </a:r>
             <a:endParaRPr lang="en-US" sz="4000" dirty="0"/>
           </a:p>
@@ -17085,7 +17459,7 @@
                 <a:ea typeface="Calibri" pitchFamily="34" charset="-122"/>
                 <a:cs typeface="Calibri" pitchFamily="34" charset="-120"/>
               </a:rPr>
-              <a:t>HOMEWORK</a:t>
+              <a:t>REMEDIATION</a:t>
             </a:r>
             <a:endParaRPr lang="en-US" sz="1400" dirty="0"/>
           </a:p>
@@ -17150,7 +17524,7 @@
                 <a:ea typeface="Times New Roman" pitchFamily="34" charset="-122"/>
                 <a:cs typeface="Times New Roman" pitchFamily="34" charset="-120"/>
               </a:rPr>
-              <a:t>Homework</a:t>
+              <a:t>Remediation</a:t>
             </a:r>
             <a:endParaRPr lang="en-US" sz="3600" dirty="0"/>
           </a:p>
@@ -17184,7 +17558,7 @@
               <a:buNone/>
             </a:pPr>
             <a:r>
-              <a:rPr lang="en-US" sz="4000" dirty="0">
+              <a:rPr lang="en-US" sz="4000" b="1" dirty="0">
                 <a:solidFill>
                   <a:srgbClr val="111111"/>
                 </a:solidFill>
@@ -17192,7 +17566,51 @@
                 <a:ea typeface="Times New Roman" pitchFamily="34" charset="-122"/>
                 <a:cs typeface="Times New Roman" pitchFamily="34" charset="-120"/>
               </a:rPr>
-              <a:t>Ask an elder how many months of rain there are in Garoua each year and write down the months.</a:t>
+              <a:t>Fill in the blanks:</a:t>
+            </a:r>
+            <a:endParaRPr lang="en-US" sz="4000" dirty="0"/>
+          </a:p>
+          <a:p>
+            <a:pPr algn="l" marL="342900" indent="-342900">
+              <a:spcAft>
+                <a:spcPts val="800"/>
+              </a:spcAft>
+              <a:buSzPct val="100000"/>
+              <a:buFont typeface="+mj-lt"/>
+              <a:buAutoNum type="arabicPeriod" startAt="1"/>
+            </a:pPr>
+            <a:r>
+              <a:rPr lang="en-US" sz="4000" dirty="0">
+                <a:solidFill>
+                  <a:srgbClr val="111111"/>
+                </a:solidFill>
+                <a:latin typeface="Times New Roman" pitchFamily="34" charset="0"/>
+                <a:ea typeface="Times New Roman" pitchFamily="34" charset="-122"/>
+                <a:cs typeface="Times New Roman" pitchFamily="34" charset="-120"/>
+              </a:rPr>
+              <a:t>The thick forest of the South is the ______.</a:t>
+            </a:r>
+            <a:endParaRPr lang="en-US" sz="4000" dirty="0"/>
+          </a:p>
+          <a:p>
+            <a:pPr algn="l" marL="342900" indent="-342900">
+              <a:spcAft>
+                <a:spcPts val="800"/>
+              </a:spcAft>
+              <a:buSzPct val="100000"/>
+              <a:buFont typeface="+mj-lt"/>
+              <a:buAutoNum type="arabicPeriod" startAt="1"/>
+            </a:pPr>
+            <a:r>
+              <a:rPr lang="en-US" sz="4000" dirty="0">
+                <a:solidFill>
+                  <a:srgbClr val="111111"/>
+                </a:solidFill>
+                <a:latin typeface="Times New Roman" pitchFamily="34" charset="0"/>
+                <a:ea typeface="Times New Roman" pitchFamily="34" charset="-122"/>
+                <a:cs typeface="Times New Roman" pitchFamily="34" charset="-120"/>
+              </a:rPr>
+              <a:t>The vegetation around Garoua is the ______.</a:t>
             </a:r>
             <a:endParaRPr lang="en-US" sz="4000" dirty="0"/>
           </a:p>
@@ -17304,7 +17722,7 @@
                 <a:ea typeface="Calibri" pitchFamily="34" charset="-122"/>
                 <a:cs typeface="Calibri" pitchFamily="34" charset="-120"/>
               </a:rPr>
-              <a:t>NEXT LESSON</a:t>
+              <a:t>REMEDIATION</a:t>
             </a:r>
             <a:endParaRPr lang="en-US" sz="1400" dirty="0"/>
           </a:p>
@@ -17369,7 +17787,7 @@
                 <a:ea typeface="Times New Roman" pitchFamily="34" charset="-122"/>
                 <a:cs typeface="Times New Roman" pitchFamily="34" charset="-120"/>
               </a:rPr>
-              <a:t>Next Lesson</a:t>
+              <a:t>Remediation (continued)</a:t>
             </a:r>
             <a:endParaRPr lang="en-US" sz="3600" dirty="0"/>
           </a:p>
@@ -17393,17 +17811,19 @@
           <a:ln/>
         </p:spPr>
         <p:txBody>
-          <a:bodyPr wrap="square" lIns="0" tIns="0" rIns="0" bIns="0" rtlCol="0" anchor="ctr"/>
-          <a:lstStyle/>
-          <a:p>
-            <a:pPr algn="ctr" indent="0" marL="0">
+          <a:bodyPr wrap="square" lIns="0" tIns="0" rIns="0" bIns="0" rtlCol="0" anchor="t"/>
+          <a:lstStyle/>
+          <a:p>
+            <a:pPr algn="l" marL="342900" indent="-342900">
               <a:spcAft>
                 <a:spcPts val="800"/>
               </a:spcAft>
-              <a:buNone/>
+              <a:buSzPct val="100000"/>
+              <a:buFont typeface="+mj-lt"/>
+              <a:buAutoNum type="arabicPeriod" startAt="1"/>
             </a:pPr>
             <a:r>
-              <a:rPr lang="en-US" sz="4000" b="1" dirty="0">
+              <a:rPr lang="en-US" sz="4000" dirty="0">
                 <a:solidFill>
                   <a:srgbClr val="111111"/>
                 </a:solidFill>
@@ -17411,27 +17831,7 @@
                 <a:ea typeface="Times New Roman" pitchFamily="34" charset="-122"/>
                 <a:cs typeface="Times New Roman" pitchFamily="34" charset="-120"/>
               </a:rPr>
-              <a:t>Our next lesson will be on:</a:t>
-            </a:r>
-            <a:endParaRPr lang="en-US" sz="4000" dirty="0"/>
-          </a:p>
-          <a:p>
-            <a:pPr algn="ctr" indent="0" marL="0">
-              <a:spcAft>
-                <a:spcPts val="800"/>
-              </a:spcAft>
-              <a:buNone/>
-            </a:pPr>
-            <a:r>
-              <a:rPr lang="en-US" sz="4000" b="1" dirty="0">
-                <a:solidFill>
-                  <a:srgbClr val="990011"/>
-                </a:solidFill>
-                <a:latin typeface="Times New Roman" pitchFamily="34" charset="0"/>
-                <a:ea typeface="Times New Roman" pitchFamily="34" charset="-122"/>
-                <a:cs typeface="Times New Roman" pitchFamily="34" charset="-120"/>
-              </a:rPr>
-              <a:t>Practical Work 4: Construction and Reading of a Climograph</a:t>
+              <a:t>The soils of the forest region are ______ soils.</a:t>
             </a:r>
             <a:endParaRPr lang="en-US" sz="4000" dirty="0"/>
           </a:p>
@@ -17762,6 +18162,464 @@
                 <a:ea typeface="Calibri" pitchFamily="34" charset="-122"/>
                 <a:cs typeface="Calibri" pitchFamily="34" charset="-120"/>
               </a:rPr>
+              <a:t>HOMEWORK</a:t>
+            </a:r>
+            <a:endParaRPr lang="en-US" sz="1400" dirty="0"/>
+          </a:p>
+        </p:txBody>
+      </p:sp>
+      <p:pic>
+        <p:nvPicPr>
+          <p:cNvPr id="3" name="Image 0" descr="/home/claude/f4/img/minesec_sheet.png">    </p:cNvPr>
+          <p:cNvPicPr>
+            <a:picLocks noChangeAspect="1"/>
+          </p:cNvPicPr>
+          <p:nvPr/>
+        </p:nvPicPr>
+        <p:blipFill>
+          <a:blip r:embed="rId1"/>
+          <a:stretch>
+            <a:fillRect/>
+          </a:stretch>
+        </p:blipFill>
+        <p:spPr>
+          <a:xfrm>
+            <a:off x="0" y="658368"/>
+            <a:ext cx="5120640" cy="5833872"/>
+          </a:xfrm>
+          <a:prstGeom prst="rect">
+            <a:avLst/>
+          </a:prstGeom>
+        </p:spPr>
+      </p:pic>
+      <p:sp>
+        <p:nvSpPr>
+          <p:cNvPr id="4" name="Text 1"/>
+          <p:cNvSpPr/>
+          <p:nvPr/>
+        </p:nvSpPr>
+        <p:spPr>
+          <a:xfrm>
+            <a:off x="5349240" y="1005840"/>
+            <a:ext cx="6522415" cy="731520"/>
+          </a:xfrm>
+          <a:prstGeom prst="rect">
+            <a:avLst/>
+          </a:prstGeom>
+          <a:noFill/>
+          <a:ln/>
+        </p:spPr>
+        <p:txBody>
+          <a:bodyPr wrap="square" lIns="0" tIns="0" rIns="0" bIns="0" rtlCol="0" anchor="ctr">
+            <a:normAutofit/>
+          </a:bodyPr>
+          <a:lstStyle/>
+          <a:p>
+            <a:pPr algn="ctr" indent="0" marL="0">
+              <a:buNone/>
+            </a:pPr>
+            <a:r>
+              <a:rPr lang="en-US" sz="3600" b="1" dirty="0">
+                <a:solidFill>
+                  <a:srgbClr val="990011"/>
+                </a:solidFill>
+                <a:latin typeface="Times New Roman" pitchFamily="34" charset="0"/>
+                <a:ea typeface="Times New Roman" pitchFamily="34" charset="-122"/>
+                <a:cs typeface="Times New Roman" pitchFamily="34" charset="-120"/>
+              </a:rPr>
+              <a:t>Homework</a:t>
+            </a:r>
+            <a:endParaRPr lang="en-US" sz="3600" dirty="0"/>
+          </a:p>
+        </p:txBody>
+      </p:sp>
+      <p:sp>
+        <p:nvSpPr>
+          <p:cNvPr id="5" name="Text 2"/>
+          <p:cNvSpPr/>
+          <p:nvPr/>
+        </p:nvSpPr>
+        <p:spPr>
+          <a:xfrm>
+            <a:off x="5349240" y="1783080"/>
+            <a:ext cx="6522415" cy="4663440"/>
+          </a:xfrm>
+          <a:prstGeom prst="rect">
+            <a:avLst/>
+          </a:prstGeom>
+          <a:noFill/>
+          <a:ln/>
+        </p:spPr>
+        <p:txBody>
+          <a:bodyPr wrap="square" lIns="0" tIns="0" rIns="0" bIns="0" rtlCol="0" anchor="t"/>
+          <a:lstStyle/>
+          <a:p>
+            <a:pPr algn="l" indent="0" marL="0">
+              <a:spcAft>
+                <a:spcPts val="800"/>
+              </a:spcAft>
+              <a:buNone/>
+            </a:pPr>
+            <a:r>
+              <a:rPr lang="en-US" sz="4000" dirty="0">
+                <a:solidFill>
+                  <a:srgbClr val="111111"/>
+                </a:solidFill>
+                <a:latin typeface="Times New Roman" pitchFamily="34" charset="0"/>
+                <a:ea typeface="Times New Roman" pitchFamily="34" charset="-122"/>
+                <a:cs typeface="Times New Roman" pitchFamily="34" charset="-120"/>
+              </a:rPr>
+              <a:t>Ask an elder how many months of rain there are in Garoua each year and write down the months.</a:t>
+            </a:r>
+            <a:endParaRPr lang="en-US" sz="4000" dirty="0"/>
+          </a:p>
+        </p:txBody>
+      </p:sp>
+      <p:sp>
+        <p:nvSpPr>
+          <p:cNvPr id="25" name="Slide Number Placeholder 0"/>
+          <p:cNvSpPr>
+            <a:spLocks noGrp="1"/>
+          </p:cNvSpPr>
+          <p:nvPr>
+            <p:ph type="sldNum" sz="quarter" idx="4294967295"/>
+          </p:nvPr>
+        </p:nvSpPr>
+        <p:spPr>
+          <a:xfrm>
+            <a:off x="27432" y="91440"/>
+            <a:ext cx="585216" cy="475488"/>
+          </a:xfrm>
+          <a:prstGeom prst="rect">
+            <a:avLst/>
+          </a:prstGeom>
+          <a:extLst>
+            <a:ext uri="{C572A759-6A51-4108-AA02-DFA0A04FC94B}">
+              <ma14:wrappingTextBoxFlag xmlns:ma14="http://schemas.microsoft.com/office/mac/drawingml/2011/main" val="0"/>
+            </a:ext>
+          </a:extLst>
+        </p:spPr>
+        <p:txBody>
+          <a:bodyPr/>
+          <a:lstStyle>
+            <a:lvl1pPr>
+              <a:defRPr sz="2000">
+                <a:solidFill>
+                  <a:srgbClr val="FFFFFF"/>
+                </a:solidFill>
+                <a:latin typeface="Calibri"/>
+                <a:ea typeface="Calibri"/>
+                <a:cs typeface="Calibri"/>
+              </a:defRPr>
+            </a:lvl1pPr>
+          </a:lstStyle>
+          <a:p>
+            <a:pPr algn="ctr"/>
+            <a:fld id="{F7021451-1387-4CA6-816F-3879F97B5CBC}" type="slidenum">
+              <a:rPr b="1" lang="en-US"/>
+              <a:t>50</a:t>
+            </a:fld>
+            <a:endParaRPr lang="en-US"/>
+          </a:p>
+        </p:txBody>
+      </p:sp>
+    </p:spTree>
+  </p:cSld>
+  <p:clrMapOvr>
+    <a:masterClrMapping/>
+  </p:clrMapOvr>
+</p:sld>
+</file>
+
+<file path=ppt/slides/slide51.xml><?xml version="1.0" encoding="utf-8"?>
+<p:sld xmlns:a="http://schemas.openxmlformats.org/drawingml/2006/main" xmlns:r="http://schemas.openxmlformats.org/officeDocument/2006/relationships" xmlns:p="http://schemas.openxmlformats.org/presentationml/2006/main">
+  <p:cSld name="Slide 51">
+    <p:spTree>
+      <p:nvGrpSpPr>
+        <p:cNvPr id="1" name=""/>
+        <p:cNvGrpSpPr/>
+        <p:nvPr/>
+      </p:nvGrpSpPr>
+      <p:grpSpPr>
+        <a:xfrm>
+          <a:off x="0" y="0"/>
+          <a:ext cx="0" cy="0"/>
+          <a:chOff x="0" y="0"/>
+          <a:chExt cx="0" cy="0"/>
+        </a:xfrm>
+      </p:grpSpPr>
+      <p:sp>
+        <p:nvSpPr>
+          <p:cNvPr id="2" name="Text 0"/>
+          <p:cNvSpPr/>
+          <p:nvPr/>
+        </p:nvSpPr>
+        <p:spPr>
+          <a:xfrm>
+            <a:off x="457200" y="713232"/>
+            <a:ext cx="11368735" cy="274320"/>
+          </a:xfrm>
+          <a:prstGeom prst="rect">
+            <a:avLst/>
+          </a:prstGeom>
+          <a:noFill/>
+          <a:ln/>
+        </p:spPr>
+        <p:txBody>
+          <a:bodyPr wrap="square" lIns="0" tIns="0" rIns="0" bIns="0" rtlCol="0" anchor="ctr"/>
+          <a:lstStyle/>
+          <a:p>
+            <a:pPr algn="r" indent="0" marL="0">
+              <a:buNone/>
+            </a:pPr>
+            <a:r>
+              <a:rPr lang="en-US" sz="1400" b="1" dirty="0">
+                <a:solidFill>
+                  <a:srgbClr val="1C3F6E"/>
+                </a:solidFill>
+                <a:latin typeface="Calibri" pitchFamily="34" charset="0"/>
+                <a:ea typeface="Calibri" pitchFamily="34" charset="-122"/>
+                <a:cs typeface="Calibri" pitchFamily="34" charset="-120"/>
+              </a:rPr>
+              <a:t>NEXT LESSON</a:t>
+            </a:r>
+            <a:endParaRPr lang="en-US" sz="1400" dirty="0"/>
+          </a:p>
+        </p:txBody>
+      </p:sp>
+      <p:pic>
+        <p:nvPicPr>
+          <p:cNvPr id="3" name="Image 0" descr="/home/claude/f4/img/minesec_sheet.png">    </p:cNvPr>
+          <p:cNvPicPr>
+            <a:picLocks noChangeAspect="1"/>
+          </p:cNvPicPr>
+          <p:nvPr/>
+        </p:nvPicPr>
+        <p:blipFill>
+          <a:blip r:embed="rId1"/>
+          <a:stretch>
+            <a:fillRect/>
+          </a:stretch>
+        </p:blipFill>
+        <p:spPr>
+          <a:xfrm>
+            <a:off x="0" y="658368"/>
+            <a:ext cx="5120640" cy="5833872"/>
+          </a:xfrm>
+          <a:prstGeom prst="rect">
+            <a:avLst/>
+          </a:prstGeom>
+        </p:spPr>
+      </p:pic>
+      <p:sp>
+        <p:nvSpPr>
+          <p:cNvPr id="4" name="Text 1"/>
+          <p:cNvSpPr/>
+          <p:nvPr/>
+        </p:nvSpPr>
+        <p:spPr>
+          <a:xfrm>
+            <a:off x="5349240" y="1005840"/>
+            <a:ext cx="6522415" cy="731520"/>
+          </a:xfrm>
+          <a:prstGeom prst="rect">
+            <a:avLst/>
+          </a:prstGeom>
+          <a:noFill/>
+          <a:ln/>
+        </p:spPr>
+        <p:txBody>
+          <a:bodyPr wrap="square" lIns="0" tIns="0" rIns="0" bIns="0" rtlCol="0" anchor="ctr">
+            <a:normAutofit/>
+          </a:bodyPr>
+          <a:lstStyle/>
+          <a:p>
+            <a:pPr algn="ctr" indent="0" marL="0">
+              <a:buNone/>
+            </a:pPr>
+            <a:r>
+              <a:rPr lang="en-US" sz="3600" b="1" dirty="0">
+                <a:solidFill>
+                  <a:srgbClr val="990011"/>
+                </a:solidFill>
+                <a:latin typeface="Times New Roman" pitchFamily="34" charset="0"/>
+                <a:ea typeface="Times New Roman" pitchFamily="34" charset="-122"/>
+                <a:cs typeface="Times New Roman" pitchFamily="34" charset="-120"/>
+              </a:rPr>
+              <a:t>Next Lesson</a:t>
+            </a:r>
+            <a:endParaRPr lang="en-US" sz="3600" dirty="0"/>
+          </a:p>
+        </p:txBody>
+      </p:sp>
+      <p:sp>
+        <p:nvSpPr>
+          <p:cNvPr id="5" name="Text 2"/>
+          <p:cNvSpPr/>
+          <p:nvPr/>
+        </p:nvSpPr>
+        <p:spPr>
+          <a:xfrm>
+            <a:off x="5349240" y="1783080"/>
+            <a:ext cx="6522415" cy="4663440"/>
+          </a:xfrm>
+          <a:prstGeom prst="rect">
+            <a:avLst/>
+          </a:prstGeom>
+          <a:noFill/>
+          <a:ln/>
+        </p:spPr>
+        <p:txBody>
+          <a:bodyPr wrap="square" lIns="0" tIns="0" rIns="0" bIns="0" rtlCol="0" anchor="ctr"/>
+          <a:lstStyle/>
+          <a:p>
+            <a:pPr algn="ctr" indent="0" marL="0">
+              <a:spcAft>
+                <a:spcPts val="800"/>
+              </a:spcAft>
+              <a:buNone/>
+            </a:pPr>
+            <a:r>
+              <a:rPr lang="en-US" sz="4000" b="1" dirty="0">
+                <a:solidFill>
+                  <a:srgbClr val="111111"/>
+                </a:solidFill>
+                <a:latin typeface="Times New Roman" pitchFamily="34" charset="0"/>
+                <a:ea typeface="Times New Roman" pitchFamily="34" charset="-122"/>
+                <a:cs typeface="Times New Roman" pitchFamily="34" charset="-120"/>
+              </a:rPr>
+              <a:t>Our next lesson will be on:</a:t>
+            </a:r>
+            <a:endParaRPr lang="en-US" sz="4000" dirty="0"/>
+          </a:p>
+          <a:p>
+            <a:pPr algn="ctr" indent="0" marL="0">
+              <a:spcAft>
+                <a:spcPts val="800"/>
+              </a:spcAft>
+              <a:buNone/>
+            </a:pPr>
+            <a:r>
+              <a:rPr lang="en-US" sz="4000" b="1" dirty="0">
+                <a:solidFill>
+                  <a:srgbClr val="990011"/>
+                </a:solidFill>
+                <a:latin typeface="Times New Roman" pitchFamily="34" charset="0"/>
+                <a:ea typeface="Times New Roman" pitchFamily="34" charset="-122"/>
+                <a:cs typeface="Times New Roman" pitchFamily="34" charset="-120"/>
+              </a:rPr>
+              <a:t>Practical Work 4: Construction and Reading of a Climograph</a:t>
+            </a:r>
+            <a:endParaRPr lang="en-US" sz="4000" dirty="0"/>
+          </a:p>
+        </p:txBody>
+      </p:sp>
+      <p:sp>
+        <p:nvSpPr>
+          <p:cNvPr id="25" name="Slide Number Placeholder 0"/>
+          <p:cNvSpPr>
+            <a:spLocks noGrp="1"/>
+          </p:cNvSpPr>
+          <p:nvPr>
+            <p:ph type="sldNum" sz="quarter" idx="4294967295"/>
+          </p:nvPr>
+        </p:nvSpPr>
+        <p:spPr>
+          <a:xfrm>
+            <a:off x="27432" y="91440"/>
+            <a:ext cx="585216" cy="475488"/>
+          </a:xfrm>
+          <a:prstGeom prst="rect">
+            <a:avLst/>
+          </a:prstGeom>
+          <a:extLst>
+            <a:ext uri="{C572A759-6A51-4108-AA02-DFA0A04FC94B}">
+              <ma14:wrappingTextBoxFlag xmlns:ma14="http://schemas.microsoft.com/office/mac/drawingml/2011/main" val="0"/>
+            </a:ext>
+          </a:extLst>
+        </p:spPr>
+        <p:txBody>
+          <a:bodyPr/>
+          <a:lstStyle>
+            <a:lvl1pPr>
+              <a:defRPr sz="2000">
+                <a:solidFill>
+                  <a:srgbClr val="FFFFFF"/>
+                </a:solidFill>
+                <a:latin typeface="Calibri"/>
+                <a:ea typeface="Calibri"/>
+                <a:cs typeface="Calibri"/>
+              </a:defRPr>
+            </a:lvl1pPr>
+          </a:lstStyle>
+          <a:p>
+            <a:pPr algn="ctr"/>
+            <a:fld id="{F7021451-1387-4CA6-816F-3879F97B5CBC}" type="slidenum">
+              <a:rPr b="1" lang="en-US"/>
+              <a:t>51</a:t>
+            </a:fld>
+            <a:endParaRPr lang="en-US"/>
+          </a:p>
+        </p:txBody>
+      </p:sp>
+    </p:spTree>
+  </p:cSld>
+  <p:clrMapOvr>
+    <a:masterClrMapping/>
+  </p:clrMapOvr>
+</p:sld>
+</file>
+
+<file path=ppt/slides/slide52.xml><?xml version="1.0" encoding="utf-8"?>
+<p:sld xmlns:a="http://schemas.openxmlformats.org/drawingml/2006/main" xmlns:r="http://schemas.openxmlformats.org/officeDocument/2006/relationships" xmlns:p="http://schemas.openxmlformats.org/presentationml/2006/main">
+  <p:cSld name="Slide 52">
+    <p:spTree>
+      <p:nvGrpSpPr>
+        <p:cNvPr id="1" name=""/>
+        <p:cNvGrpSpPr/>
+        <p:nvPr/>
+      </p:nvGrpSpPr>
+      <p:grpSpPr>
+        <a:xfrm>
+          <a:off x="0" y="0"/>
+          <a:ext cx="0" cy="0"/>
+          <a:chOff x="0" y="0"/>
+          <a:chExt cx="0" cy="0"/>
+        </a:xfrm>
+      </p:grpSpPr>
+      <p:sp>
+        <p:nvSpPr>
+          <p:cNvPr id="2" name="Text 0"/>
+          <p:cNvSpPr/>
+          <p:nvPr/>
+        </p:nvSpPr>
+        <p:spPr>
+          <a:xfrm>
+            <a:off x="457200" y="713232"/>
+            <a:ext cx="11368735" cy="274320"/>
+          </a:xfrm>
+          <a:prstGeom prst="rect">
+            <a:avLst/>
+          </a:prstGeom>
+          <a:noFill/>
+          <a:ln/>
+        </p:spPr>
+        <p:txBody>
+          <a:bodyPr wrap="square" lIns="0" tIns="0" rIns="0" bIns="0" rtlCol="0" anchor="ctr"/>
+          <a:lstStyle/>
+          <a:p>
+            <a:pPr algn="r" indent="0" marL="0">
+              <a:buNone/>
+            </a:pPr>
+            <a:r>
+              <a:rPr lang="en-US" sz="1400" b="1" dirty="0">
+                <a:solidFill>
+                  <a:srgbClr val="1C3F6E"/>
+                </a:solidFill>
+                <a:latin typeface="Calibri" pitchFamily="34" charset="0"/>
+                <a:ea typeface="Calibri" pitchFamily="34" charset="-122"/>
+                <a:cs typeface="Calibri" pitchFamily="34" charset="-120"/>
+              </a:rPr>
               <a:t>BILINGUAL GAME</a:t>
             </a:r>
             <a:endParaRPr lang="en-US" sz="1400" dirty="0"/>
@@ -17809,7 +18667,7 @@
       </p:sp>
       <p:graphicFrame>
         <p:nvGraphicFramePr>
-          <p:cNvPr id="51" name="Table 0"/>
+          <p:cNvPr id="53" name="Table 0"/>
           <p:cNvGraphicFramePr>
             <a:graphicFrameLocks noGrp="1"/>
           </p:cNvGraphicFramePr>
@@ -18845,7 +19703,7 @@
             <a:pPr algn="ctr"/>
             <a:fld id="{F7021451-1387-4CA6-816F-3879F97B5CBC}" type="slidenum">
               <a:rPr b="1" lang="en-US"/>
-              <a:t>50</a:t>
+              <a:t>52</a:t>
             </a:fld>
             <a:endParaRPr lang="en-US"/>
           </a:p>
@@ -18859,9 +19717,9 @@
 </p:sld>
 </file>
 
-<file path=ppt/slides/slide51.xml><?xml version="1.0" encoding="utf-8"?>
+<file path=ppt/slides/slide53.xml><?xml version="1.0" encoding="utf-8"?>
 <p:sld xmlns:a="http://schemas.openxmlformats.org/drawingml/2006/main" xmlns:r="http://schemas.openxmlformats.org/officeDocument/2006/relationships" xmlns:p="http://schemas.openxmlformats.org/presentationml/2006/main">
-  <p:cSld name="Slide 51">
+  <p:cSld name="Slide 53">
     <p:spTree>
       <p:nvGrpSpPr>
         <p:cNvPr id="1" name=""/>
@@ -18956,7 +19814,7 @@
       </p:sp>
       <p:graphicFrame>
         <p:nvGraphicFramePr>
-          <p:cNvPr id="52" name="Table 0"/>
+          <p:cNvPr id="54" name="Table 0"/>
           <p:cNvGraphicFramePr>
             <a:graphicFrameLocks noGrp="1"/>
           </p:cNvGraphicFramePr>
@@ -19342,7 +20200,7 @@
                           <a:ea typeface="Calibri" pitchFamily="34" charset="-122"/>
                           <a:cs typeface="Calibri" pitchFamily="34" charset="-120"/>
                         </a:rPr>
-                        <a:t>Locate the equatorial and tropical regions of Cameroon. Describe their climate, vegetation and soils. Compare the two regions.</a:t>
+                        <a:t>Locate the equatorial and tropical regions of Cameroon. Describe the climate, vegetation and soils of the equatorial region. Describe the climate, vegetation and soils of the tropical region.</a:t>
                       </a:r>
                       <a:endParaRPr lang="en-US" sz="1600" dirty="0">
                         <a:latin typeface="Calibri" charset="0"/>
@@ -19578,7 +20436,7 @@
             <a:pPr algn="ctr"/>
             <a:fld id="{F7021451-1387-4CA6-816F-3879F97B5CBC}" type="slidenum">
               <a:rPr b="1" lang="en-US"/>
-              <a:t>51</a:t>
+              <a:t>53</a:t>
             </a:fld>
             <a:endParaRPr lang="en-US"/>
           </a:p>
@@ -19592,9 +20450,9 @@
 </p:sld>
 </file>
 
-<file path=ppt/slides/slide52.xml><?xml version="1.0" encoding="utf-8"?>
+<file path=ppt/slides/slide54.xml><?xml version="1.0" encoding="utf-8"?>
 <p:sld xmlns:a="http://schemas.openxmlformats.org/drawingml/2006/main" xmlns:r="http://schemas.openxmlformats.org/officeDocument/2006/relationships" xmlns:p="http://schemas.openxmlformats.org/presentationml/2006/main">
-  <p:cSld name="Slide 52">
+  <p:cSld name="Slide 54">
     <p:spTree>
       <p:nvGrpSpPr>
         <p:cNvPr id="1" name=""/>
@@ -19689,7 +20547,7 @@
       </p:sp>
       <p:graphicFrame>
         <p:nvGraphicFramePr>
-          <p:cNvPr id="53" name="Table 0"/>
+          <p:cNvPr id="55" name="Table 0"/>
           <p:cNvGraphicFramePr>
             <a:graphicFrameLocks noGrp="1"/>
           </p:cNvGraphicFramePr>
@@ -20449,7 +21307,7 @@
             <a:pPr algn="ctr"/>
             <a:fld id="{F7021451-1387-4CA6-816F-3879F97B5CBC}" type="slidenum">
               <a:rPr b="1" lang="en-US"/>
-              <a:t>52</a:t>
+              <a:t>54</a:t>
             </a:fld>
             <a:endParaRPr lang="en-US"/>
           </a:p>
@@ -20463,9 +21321,9 @@
 </p:sld>
 </file>
 
-<file path=ppt/slides/slide53.xml><?xml version="1.0" encoding="utf-8"?>
+<file path=ppt/slides/slide55.xml><?xml version="1.0" encoding="utf-8"?>
 <p:sld xmlns:a="http://schemas.openxmlformats.org/drawingml/2006/main" xmlns:r="http://schemas.openxmlformats.org/officeDocument/2006/relationships" xmlns:p="http://schemas.openxmlformats.org/presentationml/2006/main">
-  <p:cSld name="Slide 53">
+  <p:cSld name="Slide 55">
     <p:spTree>
       <p:nvGrpSpPr>
         <p:cNvPr id="1" name=""/>
@@ -20774,7 +21632,7 @@
             <a:pPr algn="ctr"/>
             <a:fld id="{F7021451-1387-4CA6-816F-3879F97B5CBC}" type="slidenum">
               <a:rPr b="1" lang="en-US"/>
-              <a:t>53</a:t>
+              <a:t>55</a:t>
             </a:fld>
             <a:endParaRPr lang="en-US"/>
           </a:p>
@@ -20788,9 +21646,9 @@
 </p:sld>
 </file>
 
-<file path=ppt/slides/slide54.xml><?xml version="1.0" encoding="utf-8"?>
+<file path=ppt/slides/slide56.xml><?xml version="1.0" encoding="utf-8"?>
 <p:sld xmlns:a="http://schemas.openxmlformats.org/drawingml/2006/main" xmlns:r="http://schemas.openxmlformats.org/officeDocument/2006/relationships" xmlns:p="http://schemas.openxmlformats.org/presentationml/2006/main">
-  <p:cSld name="Slide 54">
+  <p:cSld name="Slide 56">
     <p:spTree>
       <p:nvGrpSpPr>
         <p:cNvPr id="1" name=""/>
@@ -20861,7 +21719,7 @@
         <p:spPr>
           <a:xfrm>
             <a:off x="0" y="658368"/>
-            <a:ext cx="5120640" cy="5833872"/>
+            <a:ext cx="2468880" cy="5833872"/>
           </a:xfrm>
           <a:prstGeom prst="rect">
             <a:avLst/>
@@ -20876,8 +21734,8 @@
         </p:nvSpPr>
         <p:spPr>
           <a:xfrm>
-            <a:off x="5349240" y="1005840"/>
-            <a:ext cx="6522415" cy="731520"/>
+            <a:off x="2697480" y="1005840"/>
+            <a:ext cx="9174175" cy="731520"/>
           </a:xfrm>
           <a:prstGeom prst="rect">
             <a:avLst/>
@@ -20917,8 +21775,8 @@
         </p:nvSpPr>
         <p:spPr>
           <a:xfrm>
-            <a:off x="5349240" y="1783080"/>
-            <a:ext cx="6522415" cy="4663440"/>
+            <a:off x="2697480" y="1783080"/>
+            <a:ext cx="9174175" cy="4663440"/>
           </a:xfrm>
           <a:prstGeom prst="rect">
             <a:avLst/>
@@ -21009,6 +21867,48 @@
                 <a:ea typeface="Calibri" pitchFamily="34" charset="-122"/>
                 <a:cs typeface="Calibri" pitchFamily="34" charset="-120"/>
               </a:rPr>
+              <a:t>Photo, board summary (Soil): “in the middle of nowhere, morocco” by mariusz kluzniak, CC BY-NC-ND 2.0, via Flickr (https://www.flickr.com/photos/39997856@N03/8398997251)</a:t>
+            </a:r>
+            <a:endParaRPr lang="en-US" sz="1800" dirty="0"/>
+          </a:p>
+          <a:p>
+            <a:pPr algn="l" marL="342900" indent="-342900">
+              <a:spcAft>
+                <a:spcPts val="800"/>
+              </a:spcAft>
+              <a:buSzPct val="100000"/>
+              <a:buChar char="•"/>
+            </a:pPr>
+            <a:r>
+              <a:rPr lang="en-US" sz="1800" dirty="0">
+                <a:solidFill>
+                  <a:srgbClr val="111111"/>
+                </a:solidFill>
+                <a:latin typeface="Calibri" pitchFamily="34" charset="0"/>
+                <a:ea typeface="Calibri" pitchFamily="34" charset="-122"/>
+                <a:cs typeface="Calibri" pitchFamily="34" charset="-120"/>
+              </a:rPr>
+              <a:t>Photo, board summary (Soil): “Laterite soil bricks in Richard Rebello's farm” by India Water Portal, CC BY-NC-SA 2.0, via Flickr (https://www.flickr.com/photos/21623815@N03/10720461943)</a:t>
+            </a:r>
+            <a:endParaRPr lang="en-US" sz="1800" dirty="0"/>
+          </a:p>
+          <a:p>
+            <a:pPr algn="l" marL="342900" indent="-342900">
+              <a:spcAft>
+                <a:spcPts val="800"/>
+              </a:spcAft>
+              <a:buSzPct val="100000"/>
+              <a:buChar char="•"/>
+            </a:pPr>
+            <a:r>
+              <a:rPr lang="en-US" sz="1800" dirty="0">
+                <a:solidFill>
+                  <a:srgbClr val="111111"/>
+                </a:solidFill>
+                <a:latin typeface="Calibri" pitchFamily="34" charset="0"/>
+                <a:ea typeface="Calibri" pitchFamily="34" charset="-122"/>
+                <a:cs typeface="Calibri" pitchFamily="34" charset="-120"/>
+              </a:rPr>
               <a:t>Diagrams and animations: drawn for this lesson (Geography Department).</a:t>
             </a:r>
             <a:endParaRPr lang="en-US" sz="1800" dirty="0"/>
@@ -21057,7 +21957,7 @@
             <a:pPr algn="ctr"/>
             <a:fld id="{F7021451-1387-4CA6-816F-3879F97B5CBC}" type="slidenum">
               <a:rPr b="1" lang="en-US"/>
-              <a:t>54</a:t>
+              <a:t>56</a:t>
             </a:fld>
             <a:endParaRPr lang="en-US"/>
           </a:p>
@@ -21475,7 +22375,7 @@
         <p:spPr>
           <a:xfrm>
             <a:off x="0" y="658368"/>
-            <a:ext cx="5120640" cy="5833872"/>
+            <a:ext cx="3840480" cy="5833872"/>
           </a:xfrm>
           <a:prstGeom prst="rect">
             <a:avLst/>
@@ -21490,8 +22390,8 @@
         </p:nvSpPr>
         <p:spPr>
           <a:xfrm>
-            <a:off x="5349240" y="1005840"/>
-            <a:ext cx="6522415" cy="731520"/>
+            <a:off x="4069080" y="1005840"/>
+            <a:ext cx="7802575" cy="731520"/>
           </a:xfrm>
           <a:prstGeom prst="rect">
             <a:avLst/>
@@ -21531,8 +22431,8 @@
         </p:nvSpPr>
         <p:spPr>
           <a:xfrm>
-            <a:off x="5349240" y="1783080"/>
-            <a:ext cx="6522415" cy="4663440"/>
+            <a:off x="4069080" y="1783080"/>
+            <a:ext cx="7802575" cy="4663440"/>
           </a:xfrm>
           <a:prstGeom prst="rect">
             <a:avLst/>
@@ -21603,7 +22503,7 @@
                 <a:ea typeface="Times New Roman" pitchFamily="34" charset="-122"/>
                 <a:cs typeface="Times New Roman" pitchFamily="34" charset="-120"/>
               </a:rPr>
-              <a:t>Describe their climate, vegetation and soils.</a:t>
+              <a:t>Describe the climate, vegetation and soils of the equatorial region.</a:t>
             </a:r>
             <a:endParaRPr lang="en-US" sz="4000" dirty="0"/>
           </a:p>
@@ -21824,7 +22724,7 @@
                 <a:ea typeface="Times New Roman" pitchFamily="34" charset="-122"/>
                 <a:cs typeface="Times New Roman" pitchFamily="34" charset="-120"/>
               </a:rPr>
-              <a:t>Compare the two regions.</a:t>
+              <a:t>Describe the climate, vegetation and soils of the tropical region.</a:t>
             </a:r>
             <a:endParaRPr lang="en-US" sz="4000" dirty="0"/>
           </a:p>

--- a/lecons/F1/08_F1_M2_L05_Natural_Regions_Bio_climatic_Zones_of_Cameroon.pptx
+++ b/lecons/F1/08_F1_M2_L05_Natural_Regions_Bio_climatic_Zones_of_Cameroon.pptx
@@ -13612,7 +13612,7 @@
         <p:spPr>
           <a:xfrm>
             <a:off x="0" y="658368"/>
-            <a:ext cx="3840480" cy="5833872"/>
+            <a:ext cx="5120640" cy="5833872"/>
           </a:xfrm>
           <a:prstGeom prst="rect">
             <a:avLst/>
@@ -13627,8 +13627,8 @@
         </p:nvSpPr>
         <p:spPr>
           <a:xfrm>
-            <a:off x="4069080" y="1005840"/>
-            <a:ext cx="7802575" cy="731520"/>
+            <a:off x="5349240" y="1005840"/>
+            <a:ext cx="6522415" cy="731520"/>
           </a:xfrm>
           <a:prstGeom prst="rect">
             <a:avLst/>
@@ -13668,8 +13668,8 @@
         </p:nvSpPr>
         <p:spPr>
           <a:xfrm>
-            <a:off x="4069080" y="1783080"/>
-            <a:ext cx="7802575" cy="4663440"/>
+            <a:off x="5349240" y="1783080"/>
+            <a:ext cx="6522415" cy="4663440"/>
           </a:xfrm>
           <a:prstGeom prst="rect">
             <a:avLst/>
@@ -13688,7 +13688,7 @@
               <a:buNone/>
             </a:pPr>
             <a:r>
-              <a:rPr lang="en-US" sz="4000" b="1" dirty="0">
+              <a:rPr lang="en-US" sz="3200" b="1" dirty="0">
                 <a:solidFill>
                   <a:srgbClr val="111111"/>
                 </a:solidFill>
@@ -13698,7 +13698,7 @@
               </a:rPr>
               <a:t>Topic: Let's Preserve our Environment</a:t>
             </a:r>
-            <a:endParaRPr lang="en-US" sz="4000" dirty="0"/>
+            <a:endParaRPr lang="en-US" sz="3200" dirty="0"/>
           </a:p>
           <a:p>
             <a:pPr algn="l" indent="0" marL="0">
@@ -13708,7 +13708,7 @@
               <a:buNone/>
             </a:pPr>
             <a:r>
-              <a:rPr lang="en-US" sz="4000" b="1" dirty="0">
+              <a:rPr lang="en-US" sz="3200" b="1" dirty="0">
                 <a:solidFill>
                   <a:srgbClr val="111111"/>
                 </a:solidFill>
@@ -13718,7 +13718,7 @@
               </a:rPr>
               <a:t>Sub-topic: Natural Regions (Bio-climatic Zones) and their Degradation</a:t>
             </a:r>
-            <a:endParaRPr lang="en-US" sz="4000" dirty="0"/>
+            <a:endParaRPr lang="en-US" sz="3200" dirty="0"/>
           </a:p>
           <a:p>
             <a:pPr algn="l" indent="0" marL="0">
@@ -13728,7 +13728,7 @@
               <a:buNone/>
             </a:pPr>
             <a:r>
-              <a:rPr lang="en-US" sz="4000" b="1" dirty="0">
+              <a:rPr lang="en-US" sz="3200" b="1" dirty="0">
                 <a:solidFill>
                   <a:srgbClr val="990011"/>
                 </a:solidFill>
@@ -13738,7 +13738,7 @@
               </a:rPr>
               <a:t>Lesson 5: Natural Regions (Bio-climatic Zones) of Cameroon</a:t>
             </a:r>
-            <a:endParaRPr lang="en-US" sz="4000" dirty="0"/>
+            <a:endParaRPr lang="en-US" sz="3200" dirty="0"/>
           </a:p>
         </p:txBody>
       </p:sp>

--- a/lecons/F1/08_F1_M2_L05_Natural_Regions_Bio_climatic_Zones_of_Cameroon.pptx
+++ b/lecons/F1/08_F1_M2_L05_Natural_Regions_Bio_climatic_Zones_of_Cameroon.pptx
@@ -3109,7 +3109,7 @@
           <a:p>
             <a:r>
               <a:rPr lang="en-US" dirty="0"/>
-              <a:t>Let us copy The Equatorial Region. The equatorial region of southern Cameroon has the following characteristics. Copy the point on Location on the left, then draw the diagram on the right: the natural regions of Cameroon. Give it a title and label it clearly.</a:t>
+              <a:t>Let us copy The Equatorial Region. The location and characteristics of the equatorial region of southern Cameroon are the following. Copy the point on Location on the left, then draw the diagram on the right: the natural regions of Cameroon. Give it a title and label it clearly.</a:t>
             </a:r>
             <a:endParaRPr lang="en-US" dirty="0"/>
           </a:p>
@@ -3549,7 +3549,7 @@
           <a:p>
             <a:r>
               <a:rPr lang="en-US" dirty="0"/>
-              <a:t>Let us copy The Tropical Region. The tropical region of northern Cameroon has the following characteristics. Copy the point on Location on the left, then draw the diagram on the right: the climates of Cameroon. Give it a title and label it clearly.</a:t>
+              <a:t>Let us copy The Tropical Region. The location and characteristics of the tropical region of northern Cameroon are the following. Copy the point on Location on the left, then draw the diagram on the right: the climates of Cameroon. Give it a title and label it clearly.</a:t>
             </a:r>
             <a:endParaRPr lang="en-US" dirty="0"/>
           </a:p>
@@ -14179,7 +14179,7 @@
               <a:buNone/>
             </a:pPr>
             <a:r>
-              <a:rPr lang="en-US" sz="3200" i="1" dirty="0">
+              <a:rPr lang="en-US" sz="2800" i="1" dirty="0">
                 <a:solidFill>
                   <a:srgbClr val="111111"/>
                 </a:solidFill>
@@ -14187,9 +14187,9 @@
                 <a:ea typeface="Times New Roman" pitchFamily="34" charset="-122"/>
                 <a:cs typeface="Times New Roman" pitchFamily="34" charset="-120"/>
               </a:rPr>
-              <a:t>The equatorial region of southern Cameroon has the following characteristics:</a:t>
-            </a:r>
-            <a:endParaRPr lang="en-US" sz="3200" dirty="0"/>
+              <a:t>The location and characteristics of the equatorial region of southern Cameroon are the following:</a:t>
+            </a:r>
+            <a:endParaRPr lang="en-US" sz="2800" dirty="0"/>
           </a:p>
           <a:p>
             <a:pPr algn="l" indent="0" marL="0">
@@ -14199,7 +14199,7 @@
               <a:buNone/>
             </a:pPr>
             <a:r>
-              <a:rPr lang="en-US" sz="3200" b="1" dirty="0">
+              <a:rPr lang="en-US" sz="2800" b="1" dirty="0">
                 <a:solidFill>
                   <a:srgbClr val="111111"/>
                 </a:solidFill>
@@ -14216,7 +14216,7 @@
               <a:buNone/>
             </a:pPr>
             <a:r>
-              <a:rPr lang="en-US" sz="3200" dirty="0">
+              <a:rPr lang="en-US" sz="2800" dirty="0">
                 <a:solidFill>
                   <a:srgbClr val="111111"/>
                 </a:solidFill>
@@ -14226,7 +14226,7 @@
               </a:rPr>
               <a:t>It covers the South, Centre, East, Littoral and South-West Regions, south of about 6° N.</a:t>
             </a:r>
-            <a:endParaRPr lang="en-US" sz="3200" dirty="0"/>
+            <a:endParaRPr lang="en-US" sz="2800" dirty="0"/>
           </a:p>
         </p:txBody>
       </p:sp>
@@ -15538,7 +15538,7 @@
               <a:buNone/>
             </a:pPr>
             <a:r>
-              <a:rPr lang="en-US" sz="3600" i="1" dirty="0">
+              <a:rPr lang="en-US" sz="3200" i="1" dirty="0">
                 <a:solidFill>
                   <a:srgbClr val="111111"/>
                 </a:solidFill>
@@ -15546,9 +15546,9 @@
                 <a:ea typeface="Times New Roman" pitchFamily="34" charset="-122"/>
                 <a:cs typeface="Times New Roman" pitchFamily="34" charset="-120"/>
               </a:rPr>
-              <a:t>The tropical region of northern Cameroon has the following characteristics:</a:t>
-            </a:r>
-            <a:endParaRPr lang="en-US" sz="3600" dirty="0"/>
+              <a:t>The location and characteristics of the tropical region of northern Cameroon are the following:</a:t>
+            </a:r>
+            <a:endParaRPr lang="en-US" sz="3200" dirty="0"/>
           </a:p>
           <a:p>
             <a:pPr algn="l" indent="0" marL="0">
@@ -15558,7 +15558,7 @@
               <a:buNone/>
             </a:pPr>
             <a:r>
-              <a:rPr lang="en-US" sz="3600" b="1" dirty="0">
+              <a:rPr lang="en-US" sz="3200" b="1" dirty="0">
                 <a:solidFill>
                   <a:srgbClr val="111111"/>
                 </a:solidFill>
@@ -15575,7 +15575,7 @@
               <a:buNone/>
             </a:pPr>
             <a:r>
-              <a:rPr lang="en-US" sz="3600" dirty="0">
+              <a:rPr lang="en-US" sz="3200" dirty="0">
                 <a:solidFill>
                   <a:srgbClr val="111111"/>
                 </a:solidFill>
@@ -15585,7 +15585,7 @@
               </a:rPr>
               <a:t>It covers the Adamawa, North and Far North Regions, north of about 6° N.</a:t>
             </a:r>
-            <a:endParaRPr lang="en-US" sz="3600" dirty="0"/>
+            <a:endParaRPr lang="en-US" sz="3200" dirty="0"/>
           </a:p>
         </p:txBody>
       </p:sp>

--- a/lecons/F1/08_F1_M2_L05_Natural_Regions_Bio_climatic_Zones_of_Cameroon.pptx
+++ b/lecons/F1/08_F1_M2_L05_Natural_Regions_Bio_climatic_Zones_of_Cameroon.pptx
@@ -3461,7 +3461,7 @@
           <a:p>
             <a:r>
               <a:rPr lang="en-US" dirty="0"/>
-              <a:t>Before we start the new lesson, let us correct the homework I gave you at the end of Lesson 4: The Notion of the Environment. The question was: List five living things and five non-living things in your school compound. Take out your exercise books.</a:t>
+              <a:t>Before we start the new lesson, let us correct the homework I gave you at the end of Lesson 4: The Notion of the Environment. The question was: Name the two natural regions of Cameroon. Take out your exercise books.</a:t>
             </a:r>
             <a:endParaRPr lang="en-US" dirty="0"/>
           </a:p>
@@ -4429,7 +4429,7 @@
           <a:p>
             <a:r>
               <a:rPr lang="en-US" dirty="0"/>
-              <a:t>Here is a good answer. Living: trees, grass, birds, ants, people. Non-living: soil, stones, water, air, sunlight. Compare it with your own answer and correct your work in red.</a:t>
+              <a:t>Here is a good answer. The equatorial region in the south and the tropical region in the north. Compare it with your own answer and correct your work in red.</a:t>
             </a:r>
             <a:endParaRPr lang="en-US" dirty="0"/>
           </a:p>
@@ -4517,7 +4517,7 @@
           <a:p>
             <a:r>
               <a:rPr lang="en-US" dirty="0"/>
-              <a:t>For your homework: Ask an elder how many months of rain there are in Garoua each year and write down the months. We shall correct it at the beginning of our next lesson.</a:t>
+              <a:t>For your homework: Name the two elements shown on a climograph. We shall correct it at the beginning of our next lesson.</a:t>
             </a:r>
             <a:endParaRPr lang="en-US" dirty="0"/>
           </a:p>
@@ -15351,7 +15351,7 @@
                 <a:ea typeface="Times New Roman" pitchFamily="34" charset="-122"/>
                 <a:cs typeface="Times New Roman" pitchFamily="34" charset="-120"/>
               </a:rPr>
-              <a:t>List five living things and five non-living things in your school compound.</a:t>
+              <a:t>Name the two natural regions of Cameroon.</a:t>
             </a:r>
             <a:endParaRPr lang="en-US" sz="4000" dirty="0"/>
           </a:p>
@@ -18050,7 +18050,7 @@
                 <a:ea typeface="Times New Roman" pitchFamily="34" charset="-122"/>
                 <a:cs typeface="Times New Roman" pitchFamily="34" charset="-120"/>
               </a:rPr>
-              <a:t>Living: trees, grass, birds, ants, people. Non-living: soil, stones, water, air, sunlight.</a:t>
+              <a:t>The equatorial region in the south and the tropical region in the north.</a:t>
             </a:r>
             <a:endParaRPr lang="en-US" sz="4000" dirty="0"/>
           </a:p>
@@ -18269,7 +18269,7 @@
                 <a:ea typeface="Times New Roman" pitchFamily="34" charset="-122"/>
                 <a:cs typeface="Times New Roman" pitchFamily="34" charset="-120"/>
               </a:rPr>
-              <a:t>Ask an elder how many months of rain there are in Garoua each year and write down the months.</a:t>
+              <a:t>Name the two elements shown on a climograph.</a:t>
             </a:r>
             <a:endParaRPr lang="en-US" sz="4000" dirty="0"/>
           </a:p>
@@ -20933,7 +20933,7 @@
                           <a:ea typeface="Calibri" pitchFamily="34" charset="-122"/>
                           <a:cs typeface="Calibri" pitchFamily="34" charset="-120"/>
                         </a:rPr>
-                        <a:t>Ask an elder how many months of rain there are in Garoua each year and write down the months.</a:t>
+                        <a:t>Name the two elements shown on a climograph.</a:t>
                       </a:r>
                       <a:endParaRPr lang="en-US" sz="1600" dirty="0">
                         <a:latin typeface="Calibri" charset="0"/>
